--- a/context/FRD-to-STTM-Agent-Solution-Architecture.pptx
+++ b/context/FRD-to-STTM-Agent-Solution-Architecture.pptx
@@ -3088,9 +3088,135 @@
         <p:nvPr/>
       </p:nvGrpSpPr>
       <p:grpSpPr/>
+      <p:sp>
+        <p:nvSpPr>
+          <p:cNvPr id="2" name="Rectangle 1"/>
+          <p:cNvSpPr/>
+          <p:nvPr/>
+        </p:nvSpPr>
+        <p:spPr>
+          <a:xfrm>
+            <a:off x="0" y="0"/>
+            <a:ext cx="12191695" cy="6858000"/>
+          </a:xfrm>
+          <a:prstGeom prst="rect">
+            <a:avLst/>
+          </a:prstGeom>
+          <a:solidFill>
+            <a:srgbClr val="FFFFFF"/>
+          </a:solidFill>
+          <a:ln>
+            <a:noFill/>
+          </a:ln>
+          <a:effectLst/>
+        </p:spPr>
+        <p:style>
+          <a:lnRef idx="1">
+            <a:schemeClr val="accent1"/>
+          </a:lnRef>
+          <a:fillRef idx="3">
+            <a:schemeClr val="accent1"/>
+          </a:fillRef>
+          <a:effectRef idx="2">
+            <a:schemeClr val="accent1"/>
+          </a:effectRef>
+          <a:fontRef idx="minor">
+            <a:schemeClr val="lt1"/>
+          </a:fontRef>
+        </p:style>
+        <p:txBody>
+          <a:bodyPr rtlCol="0" anchor="ctr"/>
+          <a:lstStyle/>
+          <a:p/>
+        </p:txBody>
+      </p:sp>
+      <p:sp>
+        <p:nvSpPr>
+          <p:cNvPr id="3" name="Rectangle 2"/>
+          <p:cNvSpPr/>
+          <p:nvPr/>
+        </p:nvSpPr>
+        <p:spPr>
+          <a:xfrm>
+            <a:off x="0" y="0"/>
+            <a:ext cx="12191695" cy="182880"/>
+          </a:xfrm>
+          <a:prstGeom prst="rect">
+            <a:avLst/>
+          </a:prstGeom>
+          <a:solidFill>
+            <a:srgbClr val="0A2458"/>
+          </a:solidFill>
+          <a:ln>
+            <a:noFill/>
+          </a:ln>
+          <a:effectLst/>
+        </p:spPr>
+        <p:style>
+          <a:lnRef idx="1">
+            <a:schemeClr val="accent1"/>
+          </a:lnRef>
+          <a:fillRef idx="3">
+            <a:schemeClr val="accent1"/>
+          </a:fillRef>
+          <a:effectRef idx="2">
+            <a:schemeClr val="accent1"/>
+          </a:effectRef>
+          <a:fontRef idx="minor">
+            <a:schemeClr val="lt1"/>
+          </a:fontRef>
+        </p:style>
+        <p:txBody>
+          <a:bodyPr rtlCol="0" anchor="ctr"/>
+          <a:lstStyle/>
+          <a:p/>
+        </p:txBody>
+      </p:sp>
+      <p:sp>
+        <p:nvSpPr>
+          <p:cNvPr id="4" name="Rectangle 3"/>
+          <p:cNvSpPr/>
+          <p:nvPr/>
+        </p:nvSpPr>
+        <p:spPr>
+          <a:xfrm>
+            <a:off x="0" y="0"/>
+            <a:ext cx="91440" cy="6858000"/>
+          </a:xfrm>
+          <a:prstGeom prst="rect">
+            <a:avLst/>
+          </a:prstGeom>
+          <a:solidFill>
+            <a:srgbClr val="003DA5"/>
+          </a:solidFill>
+          <a:ln>
+            <a:noFill/>
+          </a:ln>
+          <a:effectLst/>
+        </p:spPr>
+        <p:style>
+          <a:lnRef idx="1">
+            <a:schemeClr val="accent1"/>
+          </a:lnRef>
+          <a:fillRef idx="3">
+            <a:schemeClr val="accent1"/>
+          </a:fillRef>
+          <a:effectRef idx="2">
+            <a:schemeClr val="accent1"/>
+          </a:effectRef>
+          <a:fontRef idx="minor">
+            <a:schemeClr val="lt1"/>
+          </a:fontRef>
+        </p:style>
+        <p:txBody>
+          <a:bodyPr rtlCol="0" anchor="ctr"/>
+          <a:lstStyle/>
+          <a:p/>
+        </p:txBody>
+      </p:sp>
       <p:pic>
         <p:nvPicPr>
-          <p:cNvPr id="2" name="Picture 1" descr="background.png"/>
+          <p:cNvPr id="5" name="Picture 4" descr="acfc.png"/>
           <p:cNvPicPr>
             <a:picLocks noChangeAspect="1"/>
           </p:cNvPicPr>
@@ -3104,8 +3230,8 @@
         </p:blipFill>
         <p:spPr>
           <a:xfrm>
-            <a:off x="0" y="0"/>
-            <a:ext cx="12191695" cy="6858000"/>
+            <a:off x="658368" y="310896"/>
+            <a:ext cx="1188720" cy="784171"/>
           </a:xfrm>
           <a:prstGeom prst="rect">
             <a:avLst/>
@@ -3114,21 +3240,21 @@
       </p:pic>
       <p:cxnSp>
         <p:nvCxnSpPr>
-          <p:cNvPr id="3" name="Connector 2"/>
+          <p:cNvPr id="6" name="Connector 5"/>
           <p:cNvCxnSpPr/>
           <p:nvPr/>
         </p:nvCxnSpPr>
         <p:spPr>
           <a:xfrm>
-            <a:off x="210311" y="274320"/>
-            <a:ext cx="128017" cy="0"/>
+            <a:off x="2048256" y="347472"/>
+            <a:ext cx="0" cy="804672"/>
           </a:xfrm>
           <a:prstGeom prst="line">
             <a:avLst/>
           </a:prstGeom>
-          <a:ln w="6350">
+          <a:ln w="12700">
             <a:solidFill>
-              <a:srgbClr val="C5CBD3"/>
+              <a:srgbClr val="CDD2D8"/>
             </a:solidFill>
           </a:ln>
         </p:spPr>
@@ -3147,261 +3273,16 @@
           </a:fontRef>
         </p:style>
       </p:cxnSp>
-      <p:cxnSp>
-        <p:nvCxnSpPr>
-          <p:cNvPr id="4" name="Connector 3"/>
-          <p:cNvCxnSpPr/>
-          <p:nvPr/>
-        </p:nvCxnSpPr>
-        <p:spPr>
-          <a:xfrm>
-            <a:off x="274320" y="210311"/>
-            <a:ext cx="0" cy="128017"/>
-          </a:xfrm>
-          <a:prstGeom prst="line">
-            <a:avLst/>
-          </a:prstGeom>
-          <a:ln w="6350">
-            <a:solidFill>
-              <a:srgbClr val="C5CBD3"/>
-            </a:solidFill>
-          </a:ln>
-        </p:spPr>
-        <p:style>
-          <a:lnRef idx="2">
-            <a:schemeClr val="accent1"/>
-          </a:lnRef>
-          <a:fillRef idx="0">
-            <a:schemeClr val="accent1"/>
-          </a:fillRef>
-          <a:effectRef idx="1">
-            <a:schemeClr val="accent1"/>
-          </a:effectRef>
-          <a:fontRef idx="minor">
-            <a:schemeClr val="tx1"/>
-          </a:fontRef>
-        </p:style>
-      </p:cxnSp>
-      <p:cxnSp>
-        <p:nvCxnSpPr>
-          <p:cNvPr id="5" name="Connector 4"/>
-          <p:cNvCxnSpPr/>
-          <p:nvPr/>
-        </p:nvCxnSpPr>
-        <p:spPr>
-          <a:xfrm>
-            <a:off x="11853367" y="274320"/>
-            <a:ext cx="128016" cy="0"/>
-          </a:xfrm>
-          <a:prstGeom prst="line">
-            <a:avLst/>
-          </a:prstGeom>
-          <a:ln w="6350">
-            <a:solidFill>
-              <a:srgbClr val="C5CBD3"/>
-            </a:solidFill>
-          </a:ln>
-        </p:spPr>
-        <p:style>
-          <a:lnRef idx="2">
-            <a:schemeClr val="accent1"/>
-          </a:lnRef>
-          <a:fillRef idx="0">
-            <a:schemeClr val="accent1"/>
-          </a:fillRef>
-          <a:effectRef idx="1">
-            <a:schemeClr val="accent1"/>
-          </a:effectRef>
-          <a:fontRef idx="minor">
-            <a:schemeClr val="tx1"/>
-          </a:fontRef>
-        </p:style>
-      </p:cxnSp>
-      <p:cxnSp>
-        <p:nvCxnSpPr>
-          <p:cNvPr id="6" name="Connector 5"/>
-          <p:cNvCxnSpPr/>
-          <p:nvPr/>
-        </p:nvCxnSpPr>
-        <p:spPr>
-          <a:xfrm>
-            <a:off x="11917375" y="210311"/>
-            <a:ext cx="0" cy="128017"/>
-          </a:xfrm>
-          <a:prstGeom prst="line">
-            <a:avLst/>
-          </a:prstGeom>
-          <a:ln w="6350">
-            <a:solidFill>
-              <a:srgbClr val="C5CBD3"/>
-            </a:solidFill>
-          </a:ln>
-        </p:spPr>
-        <p:style>
-          <a:lnRef idx="2">
-            <a:schemeClr val="accent1"/>
-          </a:lnRef>
-          <a:fillRef idx="0">
-            <a:schemeClr val="accent1"/>
-          </a:fillRef>
-          <a:effectRef idx="1">
-            <a:schemeClr val="accent1"/>
-          </a:effectRef>
-          <a:fontRef idx="minor">
-            <a:schemeClr val="tx1"/>
-          </a:fontRef>
-        </p:style>
-      </p:cxnSp>
-      <p:cxnSp>
-        <p:nvCxnSpPr>
-          <p:cNvPr id="7" name="Connector 6"/>
-          <p:cNvCxnSpPr/>
-          <p:nvPr/>
-        </p:nvCxnSpPr>
-        <p:spPr>
-          <a:xfrm>
-            <a:off x="210311" y="6583680"/>
-            <a:ext cx="128017" cy="0"/>
-          </a:xfrm>
-          <a:prstGeom prst="line">
-            <a:avLst/>
-          </a:prstGeom>
-          <a:ln w="6350">
-            <a:solidFill>
-              <a:srgbClr val="C5CBD3"/>
-            </a:solidFill>
-          </a:ln>
-        </p:spPr>
-        <p:style>
-          <a:lnRef idx="2">
-            <a:schemeClr val="accent1"/>
-          </a:lnRef>
-          <a:fillRef idx="0">
-            <a:schemeClr val="accent1"/>
-          </a:fillRef>
-          <a:effectRef idx="1">
-            <a:schemeClr val="accent1"/>
-          </a:effectRef>
-          <a:fontRef idx="minor">
-            <a:schemeClr val="tx1"/>
-          </a:fontRef>
-        </p:style>
-      </p:cxnSp>
-      <p:cxnSp>
-        <p:nvCxnSpPr>
-          <p:cNvPr id="8" name="Connector 7"/>
-          <p:cNvCxnSpPr/>
-          <p:nvPr/>
-        </p:nvCxnSpPr>
-        <p:spPr>
-          <a:xfrm>
-            <a:off x="274320" y="6519672"/>
-            <a:ext cx="0" cy="128016"/>
-          </a:xfrm>
-          <a:prstGeom prst="line">
-            <a:avLst/>
-          </a:prstGeom>
-          <a:ln w="6350">
-            <a:solidFill>
-              <a:srgbClr val="C5CBD3"/>
-            </a:solidFill>
-          </a:ln>
-        </p:spPr>
-        <p:style>
-          <a:lnRef idx="2">
-            <a:schemeClr val="accent1"/>
-          </a:lnRef>
-          <a:fillRef idx="0">
-            <a:schemeClr val="accent1"/>
-          </a:fillRef>
-          <a:effectRef idx="1">
-            <a:schemeClr val="accent1"/>
-          </a:effectRef>
-          <a:fontRef idx="minor">
-            <a:schemeClr val="tx1"/>
-          </a:fontRef>
-        </p:style>
-      </p:cxnSp>
-      <p:cxnSp>
-        <p:nvCxnSpPr>
-          <p:cNvPr id="9" name="Connector 8"/>
-          <p:cNvCxnSpPr/>
-          <p:nvPr/>
-        </p:nvCxnSpPr>
-        <p:spPr>
-          <a:xfrm>
-            <a:off x="11853367" y="6583680"/>
-            <a:ext cx="128016" cy="0"/>
-          </a:xfrm>
-          <a:prstGeom prst="line">
-            <a:avLst/>
-          </a:prstGeom>
-          <a:ln w="6350">
-            <a:solidFill>
-              <a:srgbClr val="C5CBD3"/>
-            </a:solidFill>
-          </a:ln>
-        </p:spPr>
-        <p:style>
-          <a:lnRef idx="2">
-            <a:schemeClr val="accent1"/>
-          </a:lnRef>
-          <a:fillRef idx="0">
-            <a:schemeClr val="accent1"/>
-          </a:fillRef>
-          <a:effectRef idx="1">
-            <a:schemeClr val="accent1"/>
-          </a:effectRef>
-          <a:fontRef idx="minor">
-            <a:schemeClr val="tx1"/>
-          </a:fontRef>
-        </p:style>
-      </p:cxnSp>
-      <p:cxnSp>
-        <p:nvCxnSpPr>
-          <p:cNvPr id="10" name="Connector 9"/>
-          <p:cNvCxnSpPr/>
-          <p:nvPr/>
-        </p:nvCxnSpPr>
-        <p:spPr>
-          <a:xfrm>
-            <a:off x="11917375" y="6519672"/>
-            <a:ext cx="0" cy="128016"/>
-          </a:xfrm>
-          <a:prstGeom prst="line">
-            <a:avLst/>
-          </a:prstGeom>
-          <a:ln w="6350">
-            <a:solidFill>
-              <a:srgbClr val="C5CBD3"/>
-            </a:solidFill>
-          </a:ln>
-        </p:spPr>
-        <p:style>
-          <a:lnRef idx="2">
-            <a:schemeClr val="accent1"/>
-          </a:lnRef>
-          <a:fillRef idx="0">
-            <a:schemeClr val="accent1"/>
-          </a:fillRef>
-          <a:effectRef idx="1">
-            <a:schemeClr val="accent1"/>
-          </a:effectRef>
-          <a:fontRef idx="minor">
-            <a:schemeClr val="tx1"/>
-          </a:fontRef>
-        </p:style>
-      </p:cxnSp>
-      <p:sp>
-        <p:nvSpPr>
-          <p:cNvPr id="11" name="TextBox 10"/>
+      <p:sp>
+        <p:nvSpPr>
+          <p:cNvPr id="7" name="TextBox 6"/>
           <p:cNvSpPr txBox="1"/>
           <p:nvPr/>
         </p:nvSpPr>
         <p:spPr>
           <a:xfrm>
-            <a:off x="548640" y="347472"/>
-            <a:ext cx="8229600" cy="219456"/>
+            <a:off x="2231136" y="347472"/>
+            <a:ext cx="7680960" cy="219456"/>
           </a:xfrm>
           <a:prstGeom prst="rect">
             <a:avLst/>
@@ -3418,25 +3299,25 @@
             <a:r>
               <a:rPr sz="900" b="1" spc="140">
                 <a:solidFill>
-                  <a:srgbClr val="5F6B7C"/>
-                </a:solidFill>
-                <a:latin typeface="Calibri"/>
+                  <a:srgbClr val="003DA5"/>
+                </a:solidFill>
+                <a:latin typeface="Segoe UI"/>
               </a:rPr>
-              <a:t>HEXAWARE  ·  AMERIHEALTH CARITAS  ·  AGENT 01 / 03</a:t>
-            </a:r>
-          </a:p>
-        </p:txBody>
-      </p:sp>
-      <p:sp>
-        <p:nvSpPr>
-          <p:cNvPr id="12" name="TextBox 11"/>
+              <a:t>AMERIHEALTH CARITAS  ·  AI-IN-ENGINEERING  ·  AGENT 01 / 03</a:t>
+            </a:r>
+          </a:p>
+        </p:txBody>
+      </p:sp>
+      <p:sp>
+        <p:nvSpPr>
+          <p:cNvPr id="8" name="TextBox 7"/>
           <p:cNvSpPr txBox="1"/>
           <p:nvPr/>
         </p:nvSpPr>
         <p:spPr>
           <a:xfrm>
-            <a:off x="548640" y="566928"/>
-            <a:ext cx="8686800" cy="502920"/>
+            <a:off x="2231136" y="548640"/>
+            <a:ext cx="8412480" cy="384048"/>
           </a:xfrm>
           <a:prstGeom prst="rect">
             <a:avLst/>
@@ -3451,20 +3332,20 @@
           <a:p>
             <a:pPr algn="l"/>
             <a:r>
-              <a:rPr sz="2800" b="1">
-                <a:solidFill>
-                  <a:srgbClr val="111418"/>
-                </a:solidFill>
-                <a:latin typeface="Calibri"/>
+              <a:rPr sz="2400" b="1" spc="-40">
+                <a:solidFill>
+                  <a:srgbClr val="0A2458"/>
+                </a:solidFill>
+                <a:latin typeface="Segoe UI"/>
               </a:rPr>
               <a:t>FRD → STTM Agent</a:t>
             </a:r>
             <a:r>
-              <a:rPr sz="1500" b="0">
-                <a:solidFill>
-                  <a:srgbClr val="5F6B7C"/>
-                </a:solidFill>
-                <a:latin typeface="Calibri"/>
+              <a:rPr sz="1300" b="0">
+                <a:solidFill>
+                  <a:srgbClr val="455560"/>
+                </a:solidFill>
+                <a:latin typeface="Segoe UI"/>
               </a:rPr>
               <a:t>    solution architecture</a:t>
             </a:r>
@@ -3473,26 +3354,22 @@
       </p:sp>
       <p:sp>
         <p:nvSpPr>
-          <p:cNvPr id="13" name="Rounded Rectangle 12"/>
+          <p:cNvPr id="9" name="Rectangle 8"/>
           <p:cNvSpPr/>
           <p:nvPr/>
         </p:nvSpPr>
         <p:spPr>
           <a:xfrm>
-            <a:off x="548640" y="1371600"/>
-            <a:ext cx="11094415" cy="1024128"/>
-          </a:xfrm>
-          <a:prstGeom prst="roundRect">
-            <a:avLst>
-              <a:gd name="adj" fmla="val 2500"/>
-            </a:avLst>
-          </a:prstGeom>
-          <a:solidFill>
-            <a:srgbClr val="F6F7F9"/>
-          </a:solidFill>
-          <a:ln w="9525">
+            <a:off x="2231136" y="932688"/>
+            <a:ext cx="2036368" cy="292608"/>
+          </a:xfrm>
+          <a:prstGeom prst="rect">
+            <a:avLst/>
+          </a:prstGeom>
+          <a:noFill/>
+          <a:ln w="12700">
             <a:solidFill>
-              <a:srgbClr val="D3D8DE"/>
+              <a:srgbClr val="003DA5"/>
             </a:solidFill>
           </a:ln>
           <a:effectLst/>
@@ -3519,14 +3396,14 @@
       </p:sp>
       <p:sp>
         <p:nvSpPr>
-          <p:cNvPr id="14" name="TextBox 13"/>
+          <p:cNvPr id="10" name="TextBox 9"/>
           <p:cNvSpPr txBox="1"/>
           <p:nvPr/>
         </p:nvSpPr>
         <p:spPr>
           <a:xfrm>
-            <a:off x="777240" y="1481328"/>
-            <a:ext cx="3657600" cy="201168"/>
+            <a:off x="2231136" y="1001268"/>
+            <a:ext cx="2036368" cy="182880"/>
           </a:xfrm>
           <a:prstGeom prst="rect">
             <a:avLst/>
@@ -3539,22 +3416,436 @@
           </a:bodyPr>
           <a:lstStyle/>
           <a:p>
+            <a:pPr algn="ctr"/>
+            <a:r>
+              <a:rPr sz="800" b="1" spc="80">
+                <a:solidFill>
+                  <a:srgbClr val="003DA5"/>
+                </a:solidFill>
+                <a:latin typeface="Segoe UI"/>
+              </a:rPr>
+              <a:t>TWO DOCUMENT INPUTS</a:t>
+            </a:r>
+          </a:p>
+        </p:txBody>
+      </p:sp>
+      <p:sp>
+        <p:nvSpPr>
+          <p:cNvPr id="11" name="Rectangle 10"/>
+          <p:cNvSpPr/>
+          <p:nvPr/>
+        </p:nvSpPr>
+        <p:spPr>
+          <a:xfrm>
+            <a:off x="4395520" y="932688"/>
+            <a:ext cx="2631643" cy="292608"/>
+          </a:xfrm>
+          <a:prstGeom prst="rect">
+            <a:avLst/>
+          </a:prstGeom>
+          <a:noFill/>
+          <a:ln w="12700">
+            <a:solidFill>
+              <a:srgbClr val="003DA5"/>
+            </a:solidFill>
+          </a:ln>
+          <a:effectLst/>
+        </p:spPr>
+        <p:style>
+          <a:lnRef idx="1">
+            <a:schemeClr val="accent1"/>
+          </a:lnRef>
+          <a:fillRef idx="3">
+            <a:schemeClr val="accent1"/>
+          </a:fillRef>
+          <a:effectRef idx="2">
+            <a:schemeClr val="accent1"/>
+          </a:effectRef>
+          <a:fontRef idx="minor">
+            <a:schemeClr val="lt1"/>
+          </a:fontRef>
+        </p:style>
+        <p:txBody>
+          <a:bodyPr rtlCol="0" anchor="ctr"/>
+          <a:lstStyle/>
+          <a:p/>
+        </p:txBody>
+      </p:sp>
+      <p:sp>
+        <p:nvSpPr>
+          <p:cNvPr id="12" name="TextBox 11"/>
+          <p:cNvSpPr txBox="1"/>
+          <p:nvPr/>
+        </p:nvSpPr>
+        <p:spPr>
+          <a:xfrm>
+            <a:off x="4395520" y="1001268"/>
+            <a:ext cx="2631643" cy="182880"/>
+          </a:xfrm>
+          <a:prstGeom prst="rect">
+            <a:avLst/>
+          </a:prstGeom>
+          <a:noFill/>
+        </p:spPr>
+        <p:txBody>
+          <a:bodyPr wrap="square" lIns="0" rIns="0" tIns="0" bIns="0" anchor="t">
+            <a:spAutoFit/>
+          </a:bodyPr>
+          <a:lstStyle/>
+          <a:p>
+            <a:pPr algn="ctr"/>
+            <a:r>
+              <a:rPr sz="800" b="1" spc="80">
+                <a:solidFill>
+                  <a:srgbClr val="003DA5"/>
+                </a:solidFill>
+                <a:latin typeface="Segoe UI"/>
+              </a:rPr>
+              <a:t>UNITY CATALOG IS THE STORE</a:t>
+            </a:r>
+          </a:p>
+        </p:txBody>
+      </p:sp>
+      <p:sp>
+        <p:nvSpPr>
+          <p:cNvPr id="13" name="Rectangle 12"/>
+          <p:cNvSpPr/>
+          <p:nvPr/>
+        </p:nvSpPr>
+        <p:spPr>
+          <a:xfrm>
+            <a:off x="7155179" y="932688"/>
+            <a:ext cx="1611172" cy="292608"/>
+          </a:xfrm>
+          <a:prstGeom prst="rect">
+            <a:avLst/>
+          </a:prstGeom>
+          <a:noFill/>
+          <a:ln w="12700">
+            <a:solidFill>
+              <a:srgbClr val="D2202F"/>
+            </a:solidFill>
+          </a:ln>
+          <a:effectLst/>
+        </p:spPr>
+        <p:style>
+          <a:lnRef idx="1">
+            <a:schemeClr val="accent1"/>
+          </a:lnRef>
+          <a:fillRef idx="3">
+            <a:schemeClr val="accent1"/>
+          </a:fillRef>
+          <a:effectRef idx="2">
+            <a:schemeClr val="accent1"/>
+          </a:effectRef>
+          <a:fontRef idx="minor">
+            <a:schemeClr val="lt1"/>
+          </a:fontRef>
+        </p:style>
+        <p:txBody>
+          <a:bodyPr rtlCol="0" anchor="ctr"/>
+          <a:lstStyle/>
+          <a:p/>
+        </p:txBody>
+      </p:sp>
+      <p:sp>
+        <p:nvSpPr>
+          <p:cNvPr id="14" name="TextBox 13"/>
+          <p:cNvSpPr txBox="1"/>
+          <p:nvPr/>
+        </p:nvSpPr>
+        <p:spPr>
+          <a:xfrm>
+            <a:off x="7155179" y="1001268"/>
+            <a:ext cx="1611172" cy="182880"/>
+          </a:xfrm>
+          <a:prstGeom prst="rect">
+            <a:avLst/>
+          </a:prstGeom>
+          <a:noFill/>
+        </p:spPr>
+        <p:txBody>
+          <a:bodyPr wrap="square" lIns="0" rIns="0" tIns="0" bIns="0" anchor="t">
+            <a:spAutoFit/>
+          </a:bodyPr>
+          <a:lstStyle/>
+          <a:p>
+            <a:pPr algn="ctr"/>
+            <a:r>
+              <a:rPr sz="800" b="1" spc="80">
+                <a:solidFill>
+                  <a:srgbClr val="D2202F"/>
+                </a:solidFill>
+                <a:latin typeface="Segoe UI"/>
+              </a:rPr>
+              <a:t>ONE MODEL CALL</a:t>
+            </a:r>
+          </a:p>
+        </p:txBody>
+      </p:sp>
+      <p:sp>
+        <p:nvSpPr>
+          <p:cNvPr id="15" name="TextBox 14"/>
+          <p:cNvSpPr txBox="1"/>
+          <p:nvPr/>
+        </p:nvSpPr>
+        <p:spPr>
+          <a:xfrm>
+            <a:off x="9247327" y="384048"/>
+            <a:ext cx="2286000" cy="475488"/>
+          </a:xfrm>
+          <a:prstGeom prst="rect">
+            <a:avLst/>
+          </a:prstGeom>
+          <a:noFill/>
+        </p:spPr>
+        <p:txBody>
+          <a:bodyPr wrap="square" lIns="0" rIns="0" tIns="0" bIns="0" anchor="t">
+            <a:spAutoFit/>
+          </a:bodyPr>
+          <a:lstStyle/>
+          <a:p>
+            <a:pPr algn="r">
+              <a:lnSpc>
+                <a:spcPct val="118000"/>
+              </a:lnSpc>
+            </a:pPr>
+            <a:r>
+              <a:rPr sz="819" b="1">
+                <a:solidFill>
+                  <a:srgbClr val="0A2458"/>
+                </a:solidFill>
+                <a:latin typeface="Segoe UI"/>
+              </a:rPr>
+              <a:t>Built by Hexaware</a:t>
+            </a:r>
+          </a:p>
+          <a:p>
+            <a:pPr algn="r">
+              <a:lnSpc>
+                <a:spcPct val="118000"/>
+              </a:lnSpc>
+            </a:pPr>
+            <a:r>
+              <a:rPr sz="819" b="0">
+                <a:solidFill>
+                  <a:srgbClr val="455560"/>
+                </a:solidFill>
+                <a:latin typeface="Segoe UI"/>
+              </a:rPr>
+              <a:t>rebuilt inside the ACFC environment</a:t>
+            </a:r>
+          </a:p>
+        </p:txBody>
+      </p:sp>
+      <p:sp>
+        <p:nvSpPr>
+          <p:cNvPr id="16" name="Rectangle 15"/>
+          <p:cNvSpPr/>
+          <p:nvPr/>
+        </p:nvSpPr>
+        <p:spPr>
+          <a:xfrm>
+            <a:off x="658368" y="1444752"/>
+            <a:ext cx="10874959" cy="1316736"/>
+          </a:xfrm>
+          <a:prstGeom prst="rect">
+            <a:avLst/>
+          </a:prstGeom>
+          <a:solidFill>
+            <a:srgbClr val="F0F0F0"/>
+          </a:solidFill>
+          <a:ln>
+            <a:noFill/>
+          </a:ln>
+          <a:effectLst/>
+        </p:spPr>
+        <p:style>
+          <a:lnRef idx="1">
+            <a:schemeClr val="accent1"/>
+          </a:lnRef>
+          <a:fillRef idx="3">
+            <a:schemeClr val="accent1"/>
+          </a:fillRef>
+          <a:effectRef idx="2">
+            <a:schemeClr val="accent1"/>
+          </a:effectRef>
+          <a:fontRef idx="minor">
+            <a:schemeClr val="lt1"/>
+          </a:fontRef>
+        </p:style>
+        <p:txBody>
+          <a:bodyPr rtlCol="0" anchor="ctr"/>
+          <a:lstStyle/>
+          <a:p/>
+        </p:txBody>
+      </p:sp>
+      <p:sp>
+        <p:nvSpPr>
+          <p:cNvPr id="17" name="Rectangle 16"/>
+          <p:cNvSpPr/>
+          <p:nvPr/>
+        </p:nvSpPr>
+        <p:spPr>
+          <a:xfrm>
+            <a:off x="658368" y="1444752"/>
+            <a:ext cx="45720" cy="1316736"/>
+          </a:xfrm>
+          <a:prstGeom prst="rect">
+            <a:avLst/>
+          </a:prstGeom>
+          <a:solidFill>
+            <a:srgbClr val="003DA5"/>
+          </a:solidFill>
+          <a:ln>
+            <a:noFill/>
+          </a:ln>
+          <a:effectLst/>
+        </p:spPr>
+        <p:style>
+          <a:lnRef idx="1">
+            <a:schemeClr val="accent1"/>
+          </a:lnRef>
+          <a:fillRef idx="3">
+            <a:schemeClr val="accent1"/>
+          </a:fillRef>
+          <a:effectRef idx="2">
+            <a:schemeClr val="accent1"/>
+          </a:effectRef>
+          <a:fontRef idx="minor">
+            <a:schemeClr val="lt1"/>
+          </a:fontRef>
+        </p:style>
+        <p:txBody>
+          <a:bodyPr rtlCol="0" anchor="ctr"/>
+          <a:lstStyle/>
+          <a:p/>
+        </p:txBody>
+      </p:sp>
+      <p:sp>
+        <p:nvSpPr>
+          <p:cNvPr id="18" name="TextBox 17"/>
+          <p:cNvSpPr txBox="1"/>
+          <p:nvPr/>
+        </p:nvSpPr>
+        <p:spPr>
+          <a:xfrm>
+            <a:off x="877824" y="1563624"/>
+            <a:ext cx="4572000" cy="182880"/>
+          </a:xfrm>
+          <a:prstGeom prst="rect">
+            <a:avLst/>
+          </a:prstGeom>
+          <a:noFill/>
+        </p:spPr>
+        <p:txBody>
+          <a:bodyPr wrap="square" lIns="0" rIns="0" tIns="0" bIns="0" anchor="t">
+            <a:spAutoFit/>
+          </a:bodyPr>
+          <a:lstStyle/>
+          <a:p>
             <a:pPr algn="l"/>
             <a:r>
-              <a:rPr sz="900" b="1" spc="140">
-                <a:solidFill>
-                  <a:srgbClr val="5642A6"/>
-                </a:solidFill>
-                <a:latin typeface="Calibri"/>
+              <a:rPr sz="850" b="1" spc="140">
+                <a:solidFill>
+                  <a:srgbClr val="003DA5"/>
+                </a:solidFill>
+                <a:latin typeface="Segoe UI"/>
               </a:rPr>
-              <a:t>SYSTEM OF RECORD</a:t>
-            </a:r>
-          </a:p>
+              <a:t>INPUTS · THE ONLY TWO DOCUMENTS THE AGENT IS GIVEN</a:t>
+            </a:r>
+          </a:p>
+        </p:txBody>
+      </p:sp>
+      <p:sp>
+        <p:nvSpPr>
+          <p:cNvPr id="19" name="Rectangle 18"/>
+          <p:cNvSpPr/>
+          <p:nvPr/>
+        </p:nvSpPr>
+        <p:spPr>
+          <a:xfrm>
+            <a:off x="877824" y="1719072"/>
+            <a:ext cx="5108295" cy="932688"/>
+          </a:xfrm>
+          <a:prstGeom prst="rect">
+            <a:avLst/>
+          </a:prstGeom>
+          <a:solidFill>
+            <a:srgbClr val="FFFFFF"/>
+          </a:solidFill>
+          <a:ln w="12700">
+            <a:solidFill>
+              <a:srgbClr val="CDD2D8"/>
+            </a:solidFill>
+          </a:ln>
+          <a:effectLst/>
+        </p:spPr>
+        <p:style>
+          <a:lnRef idx="1">
+            <a:schemeClr val="accent1"/>
+          </a:lnRef>
+          <a:fillRef idx="3">
+            <a:schemeClr val="accent1"/>
+          </a:fillRef>
+          <a:effectRef idx="2">
+            <a:schemeClr val="accent1"/>
+          </a:effectRef>
+          <a:fontRef idx="minor">
+            <a:schemeClr val="lt1"/>
+          </a:fontRef>
+        </p:style>
+        <p:txBody>
+          <a:bodyPr rtlCol="0" anchor="ctr"/>
+          <a:lstStyle/>
+          <a:p/>
+        </p:txBody>
+      </p:sp>
+      <p:sp>
+        <p:nvSpPr>
+          <p:cNvPr id="20" name="Rectangle 19"/>
+          <p:cNvSpPr/>
+          <p:nvPr/>
+        </p:nvSpPr>
+        <p:spPr>
+          <a:xfrm>
+            <a:off x="877824" y="1719072"/>
+            <a:ext cx="5108295" cy="36576"/>
+          </a:xfrm>
+          <a:prstGeom prst="rect">
+            <a:avLst/>
+          </a:prstGeom>
+          <a:solidFill>
+            <a:srgbClr val="003DA5"/>
+          </a:solidFill>
+          <a:ln>
+            <a:noFill/>
+          </a:ln>
+          <a:effectLst/>
+        </p:spPr>
+        <p:style>
+          <a:lnRef idx="1">
+            <a:schemeClr val="accent1"/>
+          </a:lnRef>
+          <a:fillRef idx="3">
+            <a:schemeClr val="accent1"/>
+          </a:fillRef>
+          <a:effectRef idx="2">
+            <a:schemeClr val="accent1"/>
+          </a:effectRef>
+          <a:fontRef idx="minor">
+            <a:schemeClr val="lt1"/>
+          </a:fontRef>
+        </p:style>
+        <p:txBody>
+          <a:bodyPr rtlCol="0" anchor="ctr"/>
+          <a:lstStyle/>
+          <a:p/>
         </p:txBody>
       </p:sp>
       <p:pic>
         <p:nvPicPr>
-          <p:cNvPr id="15" name="Picture 14" descr="sharepoint.png"/>
+          <p:cNvPr id="21" name="Picture 20" descr="word.png"/>
           <p:cNvPicPr>
             <a:picLocks noChangeAspect="1"/>
           </p:cNvPicPr>
@@ -3568,8 +3859,8 @@
         </p:blipFill>
         <p:spPr>
           <a:xfrm>
-            <a:off x="777240" y="1743075"/>
-            <a:ext cx="548640" cy="537210"/>
+            <a:off x="1024127" y="1894459"/>
+            <a:ext cx="310896" cy="289306"/>
           </a:xfrm>
           <a:prstGeom prst="rect">
             <a:avLst/>
@@ -3578,14 +3869,14 @@
       </p:pic>
       <p:sp>
         <p:nvSpPr>
-          <p:cNvPr id="16" name="TextBox 15"/>
+          <p:cNvPr id="22" name="TextBox 21"/>
           <p:cNvSpPr txBox="1"/>
           <p:nvPr/>
         </p:nvSpPr>
         <p:spPr>
           <a:xfrm>
-            <a:off x="1463040" y="1719072"/>
-            <a:ext cx="3108960" cy="274320"/>
+            <a:off x="1408176" y="1865376"/>
+            <a:ext cx="4431639" cy="219456"/>
           </a:xfrm>
           <a:prstGeom prst="rect">
             <a:avLst/>
@@ -3600,27 +3891,27 @@
           <a:p>
             <a:pPr algn="l"/>
             <a:r>
-              <a:rPr sz="1400" b="1">
-                <a:solidFill>
-                  <a:srgbClr val="1C2127"/>
-                </a:solidFill>
-                <a:latin typeface="Calibri"/>
+              <a:rPr sz="1019" b="1">
+                <a:solidFill>
+                  <a:srgbClr val="0A2458"/>
+                </a:solidFill>
+                <a:latin typeface="Consolas"/>
               </a:rPr>
-              <a:t>Microsoft SharePoint</a:t>
-            </a:r>
-          </a:p>
-        </p:txBody>
-      </p:sp>
-      <p:sp>
-        <p:nvSpPr>
-          <p:cNvPr id="17" name="TextBox 16"/>
+              <a:t>FRD_&lt;feed&gt;.docx</a:t>
+            </a:r>
+          </a:p>
+        </p:txBody>
+      </p:sp>
+      <p:sp>
+        <p:nvSpPr>
+          <p:cNvPr id="23" name="TextBox 22"/>
           <p:cNvSpPr txBox="1"/>
           <p:nvPr/>
         </p:nvSpPr>
         <p:spPr>
           <a:xfrm>
-            <a:off x="1463040" y="2011680"/>
-            <a:ext cx="3200400" cy="365760"/>
+            <a:off x="1408176" y="2084832"/>
+            <a:ext cx="4431639" cy="182880"/>
           </a:xfrm>
           <a:prstGeom prst="rect">
             <a:avLst/>
@@ -3635,39 +3926,76 @@
           <a:p>
             <a:pPr algn="l"/>
             <a:r>
-              <a:rPr sz="1000" b="0">
-                <a:solidFill>
-                  <a:srgbClr val="2F343C"/>
-                </a:solidFill>
-                <a:latin typeface="Calibri"/>
+              <a:rPr sz="740" b="1" spc="100">
+                <a:solidFill>
+                  <a:srgbClr val="003DA5"/>
+                </a:solidFill>
+                <a:latin typeface="Segoe UI"/>
               </a:rPr>
-              <a:t>The client's document library — the only place anything is authored or approved.</a:t>
-            </a:r>
-          </a:p>
-        </p:txBody>
-      </p:sp>
-      <p:sp>
-        <p:nvSpPr>
-          <p:cNvPr id="18" name="Rounded Rectangle 17"/>
+              <a:t>LIVE</a:t>
+            </a:r>
+          </a:p>
+        </p:txBody>
+      </p:sp>
+      <p:sp>
+        <p:nvSpPr>
+          <p:cNvPr id="24" name="TextBox 23"/>
+          <p:cNvSpPr txBox="1"/>
+          <p:nvPr/>
+        </p:nvSpPr>
+        <p:spPr>
+          <a:xfrm>
+            <a:off x="1024127" y="2286000"/>
+            <a:ext cx="4815687" cy="420624"/>
+          </a:xfrm>
+          <a:prstGeom prst="rect">
+            <a:avLst/>
+          </a:prstGeom>
+          <a:noFill/>
+        </p:spPr>
+        <p:txBody>
+          <a:bodyPr wrap="square" lIns="0" rIns="0" tIns="0" bIns="0" anchor="t">
+            <a:spAutoFit/>
+          </a:bodyPr>
+          <a:lstStyle/>
+          <a:p>
+            <a:pPr algn="l">
+              <a:lnSpc>
+                <a:spcPct val="112000"/>
+              </a:lnSpc>
+            </a:pPr>
+            <a:r>
+              <a:rPr sz="819" b="0">
+                <a:solidFill>
+                  <a:srgbClr val="333F48"/>
+                </a:solidFill>
+                <a:latin typeface="Segoe UI"/>
+              </a:rPr>
+              <a:t>The feed-level frame — file pattern and format, target schema and table per layer, load strategy, landing folder, DQ and recycle rules. Authored and approved by ACFC's BSAs.</a:t>
+            </a:r>
+          </a:p>
+        </p:txBody>
+      </p:sp>
+      <p:sp>
+        <p:nvSpPr>
+          <p:cNvPr id="25" name="Rectangle 24"/>
           <p:cNvSpPr/>
           <p:nvPr/>
         </p:nvSpPr>
         <p:spPr>
           <a:xfrm>
-            <a:off x="4983479" y="1673352"/>
-            <a:ext cx="2331720" cy="566928"/>
-          </a:xfrm>
-          <a:prstGeom prst="roundRect">
-            <a:avLst>
-              <a:gd name="adj" fmla="val 8000"/>
-            </a:avLst>
+            <a:off x="6205575" y="1719072"/>
+            <a:ext cx="5108295" cy="932688"/>
+          </a:xfrm>
+          <a:prstGeom prst="rect">
+            <a:avLst/>
           </a:prstGeom>
           <a:solidFill>
-            <a:srgbClr val="EDEFF2"/>
+            <a:srgbClr val="FFFFFF"/>
           </a:solidFill>
-          <a:ln w="9525">
+          <a:ln w="12700">
             <a:solidFill>
-              <a:srgbClr val="C5CBD3"/>
+              <a:srgbClr val="CDD2D8"/>
             </a:solidFill>
           </a:ln>
           <a:effectLst/>
@@ -3692,9 +4020,51 @@
           <a:p/>
         </p:txBody>
       </p:sp>
+      <p:sp>
+        <p:nvSpPr>
+          <p:cNvPr id="26" name="Rectangle 25"/>
+          <p:cNvSpPr/>
+          <p:nvPr/>
+        </p:nvSpPr>
+        <p:spPr>
+          <a:xfrm>
+            <a:off x="6205575" y="1719072"/>
+            <a:ext cx="5108295" cy="36576"/>
+          </a:xfrm>
+          <a:prstGeom prst="rect">
+            <a:avLst/>
+          </a:prstGeom>
+          <a:solidFill>
+            <a:srgbClr val="69B3E7"/>
+          </a:solidFill>
+          <a:ln>
+            <a:noFill/>
+          </a:ln>
+          <a:effectLst/>
+        </p:spPr>
+        <p:style>
+          <a:lnRef idx="1">
+            <a:schemeClr val="accent1"/>
+          </a:lnRef>
+          <a:fillRef idx="3">
+            <a:schemeClr val="accent1"/>
+          </a:fillRef>
+          <a:effectRef idx="2">
+            <a:schemeClr val="accent1"/>
+          </a:effectRef>
+          <a:fontRef idx="minor">
+            <a:schemeClr val="lt1"/>
+          </a:fontRef>
+        </p:style>
+        <p:txBody>
+          <a:bodyPr rtlCol="0" anchor="ctr"/>
+          <a:lstStyle/>
+          <a:p/>
+        </p:txBody>
+      </p:sp>
       <p:pic>
         <p:nvPicPr>
-          <p:cNvPr id="19" name="Picture 18" descr="word.png"/>
+          <p:cNvPr id="27" name="Picture 26" descr="excel.png"/>
           <p:cNvPicPr>
             <a:picLocks noChangeAspect="1"/>
           </p:cNvPicPr>
@@ -3708,8 +4078,8 @@
         </p:blipFill>
         <p:spPr>
           <a:xfrm>
-            <a:off x="5093207" y="1795145"/>
-            <a:ext cx="347472" cy="323342"/>
+            <a:off x="6351879" y="1894459"/>
+            <a:ext cx="310896" cy="289306"/>
           </a:xfrm>
           <a:prstGeom prst="rect">
             <a:avLst/>
@@ -3718,14 +4088,14 @@
       </p:pic>
       <p:sp>
         <p:nvSpPr>
-          <p:cNvPr id="20" name="TextBox 19"/>
+          <p:cNvPr id="28" name="TextBox 27"/>
           <p:cNvSpPr txBox="1"/>
           <p:nvPr/>
         </p:nvSpPr>
         <p:spPr>
           <a:xfrm>
-            <a:off x="5532119" y="1746504"/>
-            <a:ext cx="1691639" cy="219456"/>
+            <a:off x="6735927" y="1865376"/>
+            <a:ext cx="4431639" cy="219456"/>
           </a:xfrm>
           <a:prstGeom prst="rect">
             <a:avLst/>
@@ -3740,27 +4110,27 @@
           <a:p>
             <a:pPr algn="l"/>
             <a:r>
-              <a:rPr sz="1050" b="1">
-                <a:solidFill>
-                  <a:srgbClr val="1C2127"/>
-                </a:solidFill>
-                <a:latin typeface="Calibri"/>
+              <a:rPr sz="1019" b="1">
+                <a:solidFill>
+                  <a:srgbClr val="0A2458"/>
+                </a:solidFill>
+                <a:latin typeface="Consolas"/>
               </a:rPr>
-              <a:t>FRD_&lt;name&gt;.docx</a:t>
-            </a:r>
-          </a:p>
-        </p:txBody>
-      </p:sp>
-      <p:sp>
-        <p:nvSpPr>
-          <p:cNvPr id="21" name="TextBox 20"/>
+              <a:t>DICT_&lt;feed&gt;.xlsx</a:t>
+            </a:r>
+          </a:p>
+        </p:txBody>
+      </p:sp>
+      <p:sp>
+        <p:nvSpPr>
+          <p:cNvPr id="29" name="TextBox 28"/>
           <p:cNvSpPr txBox="1"/>
           <p:nvPr/>
         </p:nvSpPr>
         <p:spPr>
           <a:xfrm>
-            <a:off x="5532119" y="1965960"/>
-            <a:ext cx="1691639" cy="237744"/>
+            <a:off x="6735927" y="2084832"/>
+            <a:ext cx="4431639" cy="182880"/>
           </a:xfrm>
           <a:prstGeom prst="rect">
             <a:avLst/>
@@ -3775,40 +4145,146 @@
           <a:p>
             <a:pPr algn="l"/>
             <a:r>
-              <a:rPr sz="850" b="0">
-                <a:solidFill>
-                  <a:srgbClr val="2F343C"/>
-                </a:solidFill>
-                <a:latin typeface="Calibri"/>
+              <a:rPr sz="740" b="1" spc="100">
+                <a:solidFill>
+                  <a:srgbClr val="D2202F"/>
+                </a:solidFill>
+                <a:latin typeface="Segoe UI"/>
               </a:rPr>
-              <a:t>input — approved requirements</a:t>
-            </a:r>
-          </a:p>
-        </p:txBody>
-      </p:sp>
-      <p:sp>
-        <p:nvSpPr>
-          <p:cNvPr id="22" name="Rounded Rectangle 21"/>
+              <a:t>INGESTED · NOT YET READ BY STAGES 02–04</a:t>
+            </a:r>
+          </a:p>
+        </p:txBody>
+      </p:sp>
+      <p:sp>
+        <p:nvSpPr>
+          <p:cNvPr id="30" name="TextBox 29"/>
+          <p:cNvSpPr txBox="1"/>
+          <p:nvPr/>
+        </p:nvSpPr>
+        <p:spPr>
+          <a:xfrm>
+            <a:off x="6351879" y="2286000"/>
+            <a:ext cx="4815687" cy="420624"/>
+          </a:xfrm>
+          <a:prstGeom prst="rect">
+            <a:avLst/>
+          </a:prstGeom>
+          <a:noFill/>
+        </p:spPr>
+        <p:txBody>
+          <a:bodyPr wrap="square" lIns="0" rIns="0" tIns="0" bIns="0" anchor="t">
+            <a:spAutoFit/>
+          </a:bodyPr>
+          <a:lstStyle/>
+          <a:p>
+            <a:pPr algn="l">
+              <a:lnSpc>
+                <a:spcPct val="112000"/>
+              </a:lnSpc>
+            </a:pPr>
+            <a:r>
+              <a:rPr sz="819" b="0">
+                <a:solidFill>
+                  <a:srgbClr val="333F48"/>
+                </a:solidFill>
+                <a:latin typeface="Segoe UI"/>
+              </a:rPr>
+              <a:t>The vendor data dictionary — every source column: name, position, type, length, required, description, allowed values, PHI. Supplied by the vendor.</a:t>
+            </a:r>
+          </a:p>
+        </p:txBody>
+      </p:sp>
+      <p:cxnSp>
+        <p:nvCxnSpPr>
+          <p:cNvPr id="31" name="Connector 30"/>
+          <p:cNvCxnSpPr/>
+          <p:nvPr/>
+        </p:nvCxnSpPr>
+        <p:spPr>
+          <a:xfrm>
+            <a:off x="2670048" y="2761488"/>
+            <a:ext cx="0" cy="182880"/>
+          </a:xfrm>
+          <a:prstGeom prst="line">
+            <a:avLst/>
+          </a:prstGeom>
+          <a:ln w="22225">
+            <a:solidFill>
+              <a:srgbClr val="0A2458"/>
+            </a:solidFill>
+            <a:tailEnd type="triangle" w="med" len="med"/>
+          </a:ln>
+        </p:spPr>
+        <p:style>
+          <a:lnRef idx="2">
+            <a:schemeClr val="accent1"/>
+          </a:lnRef>
+          <a:fillRef idx="0">
+            <a:schemeClr val="accent1"/>
+          </a:fillRef>
+          <a:effectRef idx="1">
+            <a:schemeClr val="accent1"/>
+          </a:effectRef>
+          <a:fontRef idx="minor">
+            <a:schemeClr val="tx1"/>
+          </a:fontRef>
+        </p:style>
+      </p:cxnSp>
+      <p:sp>
+        <p:nvSpPr>
+          <p:cNvPr id="32" name="TextBox 31"/>
+          <p:cNvSpPr txBox="1"/>
+          <p:nvPr/>
+        </p:nvSpPr>
+        <p:spPr>
+          <a:xfrm>
+            <a:off x="2852928" y="2752344"/>
+            <a:ext cx="9046159" cy="219456"/>
+          </a:xfrm>
+          <a:prstGeom prst="rect">
+            <a:avLst/>
+          </a:prstGeom>
+          <a:noFill/>
+        </p:spPr>
+        <p:txBody>
+          <a:bodyPr wrap="square" lIns="0" rIns="0" tIns="0" bIns="0" anchor="t">
+            <a:spAutoFit/>
+          </a:bodyPr>
+          <a:lstStyle/>
+          <a:p>
+            <a:pPr algn="l"/>
+            <a:r>
+              <a:rPr sz="950" b="1">
+                <a:solidFill>
+                  <a:srgbClr val="333F48"/>
+                </a:solidFill>
+                <a:latin typeface="Segoe UI"/>
+              </a:rPr>
+              <a:t>every input lands in Unity Catalog first — the agent never reads a document over the network</a:t>
+            </a:r>
+          </a:p>
+        </p:txBody>
+      </p:sp>
+      <p:sp>
+        <p:nvSpPr>
+          <p:cNvPr id="33" name="Rectangle 32"/>
           <p:cNvSpPr/>
           <p:nvPr/>
         </p:nvSpPr>
         <p:spPr>
           <a:xfrm>
-            <a:off x="7498079" y="1673352"/>
-            <a:ext cx="2331720" cy="566928"/>
-          </a:xfrm>
-          <a:prstGeom prst="roundRect">
-            <a:avLst>
-              <a:gd name="adj" fmla="val 8000"/>
-            </a:avLst>
+            <a:off x="658368" y="2944368"/>
+            <a:ext cx="10874959" cy="1225296"/>
+          </a:xfrm>
+          <a:prstGeom prst="rect">
+            <a:avLst/>
           </a:prstGeom>
           <a:solidFill>
-            <a:srgbClr val="EDEFF2"/>
+            <a:srgbClr val="F0F0F0"/>
           </a:solidFill>
-          <a:ln w="9525">
-            <a:solidFill>
-              <a:srgbClr val="C5CBD3"/>
-            </a:solidFill>
+          <a:ln>
+            <a:noFill/>
           </a:ln>
           <a:effectLst/>
         </p:spPr>
@@ -3832,9 +4308,121 @@
           <a:p/>
         </p:txBody>
       </p:sp>
+      <p:sp>
+        <p:nvSpPr>
+          <p:cNvPr id="34" name="Rectangle 33"/>
+          <p:cNvSpPr/>
+          <p:nvPr/>
+        </p:nvSpPr>
+        <p:spPr>
+          <a:xfrm>
+            <a:off x="658368" y="2944368"/>
+            <a:ext cx="45720" cy="1225296"/>
+          </a:xfrm>
+          <a:prstGeom prst="rect">
+            <a:avLst/>
+          </a:prstGeom>
+          <a:solidFill>
+            <a:srgbClr val="0A2458"/>
+          </a:solidFill>
+          <a:ln>
+            <a:noFill/>
+          </a:ln>
+          <a:effectLst/>
+        </p:spPr>
+        <p:style>
+          <a:lnRef idx="1">
+            <a:schemeClr val="accent1"/>
+          </a:lnRef>
+          <a:fillRef idx="3">
+            <a:schemeClr val="accent1"/>
+          </a:fillRef>
+          <a:effectRef idx="2">
+            <a:schemeClr val="accent1"/>
+          </a:effectRef>
+          <a:fontRef idx="minor">
+            <a:schemeClr val="lt1"/>
+          </a:fontRef>
+        </p:style>
+        <p:txBody>
+          <a:bodyPr rtlCol="0" anchor="ctr"/>
+          <a:lstStyle/>
+          <a:p/>
+        </p:txBody>
+      </p:sp>
+      <p:sp>
+        <p:nvSpPr>
+          <p:cNvPr id="35" name="TextBox 34"/>
+          <p:cNvSpPr txBox="1"/>
+          <p:nvPr/>
+        </p:nvSpPr>
+        <p:spPr>
+          <a:xfrm>
+            <a:off x="877824" y="3063240"/>
+            <a:ext cx="4572000" cy="182880"/>
+          </a:xfrm>
+          <a:prstGeom prst="rect">
+            <a:avLst/>
+          </a:prstGeom>
+          <a:noFill/>
+        </p:spPr>
+        <p:txBody>
+          <a:bodyPr wrap="square" lIns="0" rIns="0" tIns="0" bIns="0" anchor="t">
+            <a:spAutoFit/>
+          </a:bodyPr>
+          <a:lstStyle/>
+          <a:p>
+            <a:pPr algn="l"/>
+            <a:r>
+              <a:rPr sz="850" b="1" spc="140">
+                <a:solidFill>
+                  <a:srgbClr val="0A2458"/>
+                </a:solidFill>
+                <a:latin typeface="Segoe UI"/>
+              </a:rPr>
+              <a:t>DOCUMENT LOADERS  →  THE STORE</a:t>
+            </a:r>
+          </a:p>
+        </p:txBody>
+      </p:sp>
+      <p:sp>
+        <p:nvSpPr>
+          <p:cNvPr id="36" name="TextBox 35"/>
+          <p:cNvSpPr txBox="1"/>
+          <p:nvPr/>
+        </p:nvSpPr>
+        <p:spPr>
+          <a:xfrm>
+            <a:off x="877824" y="3255264"/>
+            <a:ext cx="5120640" cy="201168"/>
+          </a:xfrm>
+          <a:prstGeom prst="rect">
+            <a:avLst/>
+          </a:prstGeom>
+          <a:noFill/>
+        </p:spPr>
+        <p:txBody>
+          <a:bodyPr wrap="square" lIns="0" rIns="0" tIns="0" bIns="0" anchor="t">
+            <a:spAutoFit/>
+          </a:bodyPr>
+          <a:lstStyle/>
+          <a:p>
+            <a:pPr algn="l"/>
+            <a:r>
+              <a:rPr sz="1019" b="1">
+                <a:solidFill>
+                  <a:srgbClr val="0A2458"/>
+                </a:solidFill>
+                <a:latin typeface="Segoe UI"/>
+              </a:rPr>
+              <a:t>Three interchangeable loaders, one interface</a:t>
+            </a:r>
+          </a:p>
+        </p:txBody>
+      </p:sp>
       <p:pic>
         <p:nvPicPr>
-          <p:cNvPr id="23" name="Picture 22" descr="excel.png"/>
+          <p:cNvPr id="37" name="Picture 36" descr="sharepoint.png"/>
           <p:cNvPicPr>
             <a:picLocks noChangeAspect="1"/>
           </p:cNvPicPr>
@@ -3848,8 +4436,8 @@
         </p:blipFill>
         <p:spPr>
           <a:xfrm>
-            <a:off x="7607807" y="1795145"/>
-            <a:ext cx="347472" cy="323342"/>
+            <a:off x="896112" y="3485769"/>
+            <a:ext cx="182880" cy="179070"/>
           </a:xfrm>
           <a:prstGeom prst="rect">
             <a:avLst/>
@@ -3858,14 +4446,14 @@
       </p:pic>
       <p:sp>
         <p:nvSpPr>
-          <p:cNvPr id="24" name="TextBox 23"/>
+          <p:cNvPr id="38" name="TextBox 37"/>
           <p:cNvSpPr txBox="1"/>
           <p:nvPr/>
         </p:nvSpPr>
         <p:spPr>
           <a:xfrm>
-            <a:off x="8046719" y="1746504"/>
-            <a:ext cx="1691639" cy="219456"/>
+            <a:off x="1188719" y="3474720"/>
+            <a:ext cx="1773936" cy="182880"/>
           </a:xfrm>
           <a:prstGeom prst="rect">
             <a:avLst/>
@@ -3880,27 +4468,27 @@
           <a:p>
             <a:pPr algn="l"/>
             <a:r>
-              <a:rPr sz="1050" b="1">
-                <a:solidFill>
-                  <a:srgbClr val="1C2127"/>
-                </a:solidFill>
-                <a:latin typeface="Calibri"/>
+              <a:rPr sz="919" b="1">
+                <a:solidFill>
+                  <a:srgbClr val="0A2458"/>
+                </a:solidFill>
+                <a:latin typeface="Segoe UI"/>
               </a:rPr>
-              <a:t>STTM_&lt;name&gt;.xlsx</a:t>
-            </a:r>
-          </a:p>
-        </p:txBody>
-      </p:sp>
-      <p:sp>
-        <p:nvSpPr>
-          <p:cNvPr id="25" name="TextBox 24"/>
+              <a:t>SharePoint library</a:t>
+            </a:r>
+          </a:p>
+        </p:txBody>
+      </p:sp>
+      <p:sp>
+        <p:nvSpPr>
+          <p:cNvPr id="39" name="TextBox 38"/>
           <p:cNvSpPr txBox="1"/>
           <p:nvPr/>
         </p:nvSpPr>
         <p:spPr>
           <a:xfrm>
-            <a:off x="8046719" y="1965960"/>
-            <a:ext cx="1691639" cy="237744"/>
+            <a:off x="2999232" y="3483864"/>
+            <a:ext cx="2084831" cy="182880"/>
           </a:xfrm>
           <a:prstGeom prst="rect">
             <a:avLst/>
@@ -3915,20 +4503,429 @@
           <a:p>
             <a:pPr algn="l"/>
             <a:r>
-              <a:rPr sz="850" b="0">
-                <a:solidFill>
-                  <a:srgbClr val="2F343C"/>
-                </a:solidFill>
-                <a:latin typeface="Calibri"/>
+              <a:rPr sz="800" b="0">
+                <a:solidFill>
+                  <a:srgbClr val="455560"/>
+                </a:solidFill>
+                <a:latin typeface="Consolas"/>
               </a:rPr>
-              <a:t>input — becomes a template</a:t>
-            </a:r>
-          </a:p>
+              <a:t>Graph, read-only</a:t>
+            </a:r>
+          </a:p>
+        </p:txBody>
+      </p:sp>
+      <p:sp>
+        <p:nvSpPr>
+          <p:cNvPr id="40" name="TextBox 39"/>
+          <p:cNvSpPr txBox="1"/>
+          <p:nvPr/>
+        </p:nvSpPr>
+        <p:spPr>
+          <a:xfrm>
+            <a:off x="5102352" y="3483864"/>
+            <a:ext cx="914400" cy="182880"/>
+          </a:xfrm>
+          <a:prstGeom prst="rect">
+            <a:avLst/>
+          </a:prstGeom>
+          <a:noFill/>
+        </p:spPr>
+        <p:txBody>
+          <a:bodyPr wrap="square" lIns="0" rIns="0" tIns="0" bIns="0" anchor="t">
+            <a:spAutoFit/>
+          </a:bodyPr>
+          <a:lstStyle/>
+          <a:p>
+            <a:pPr algn="r"/>
+            <a:r>
+              <a:rPr sz="740" b="1" spc="80">
+                <a:solidFill>
+                  <a:srgbClr val="D2202F"/>
+                </a:solidFill>
+                <a:latin typeface="Segoe UI"/>
+              </a:rPr>
+              <a:t>NOT YET WIRED</a:t>
+            </a:r>
+          </a:p>
+        </p:txBody>
+      </p:sp>
+      <p:sp>
+        <p:nvSpPr>
+          <p:cNvPr id="41" name="Rectangle 40"/>
+          <p:cNvSpPr/>
+          <p:nvPr/>
+        </p:nvSpPr>
+        <p:spPr>
+          <a:xfrm>
+            <a:off x="932688" y="3762756"/>
+            <a:ext cx="77724" cy="77724"/>
+          </a:xfrm>
+          <a:prstGeom prst="rect">
+            <a:avLst/>
+          </a:prstGeom>
+          <a:solidFill>
+            <a:srgbClr val="003DA5"/>
+          </a:solidFill>
+          <a:ln>
+            <a:noFill/>
+          </a:ln>
+          <a:effectLst/>
+        </p:spPr>
+        <p:style>
+          <a:lnRef idx="1">
+            <a:schemeClr val="accent1"/>
+          </a:lnRef>
+          <a:fillRef idx="3">
+            <a:schemeClr val="accent1"/>
+          </a:fillRef>
+          <a:effectRef idx="2">
+            <a:schemeClr val="accent1"/>
+          </a:effectRef>
+          <a:fontRef idx="minor">
+            <a:schemeClr val="lt1"/>
+          </a:fontRef>
+        </p:style>
+        <p:txBody>
+          <a:bodyPr rtlCol="0" anchor="ctr"/>
+          <a:lstStyle/>
+          <a:p/>
+        </p:txBody>
+      </p:sp>
+      <p:sp>
+        <p:nvSpPr>
+          <p:cNvPr id="42" name="TextBox 41"/>
+          <p:cNvSpPr txBox="1"/>
+          <p:nvPr/>
+        </p:nvSpPr>
+        <p:spPr>
+          <a:xfrm>
+            <a:off x="1188719" y="3694176"/>
+            <a:ext cx="1773936" cy="182880"/>
+          </a:xfrm>
+          <a:prstGeom prst="rect">
+            <a:avLst/>
+          </a:prstGeom>
+          <a:noFill/>
+        </p:spPr>
+        <p:txBody>
+          <a:bodyPr wrap="square" lIns="0" rIns="0" tIns="0" bIns="0" anchor="t">
+            <a:spAutoFit/>
+          </a:bodyPr>
+          <a:lstStyle/>
+          <a:p>
+            <a:pPr algn="l"/>
+            <a:r>
+              <a:rPr sz="919" b="1">
+                <a:solidFill>
+                  <a:srgbClr val="0A2458"/>
+                </a:solidFill>
+                <a:latin typeface="Segoe UI"/>
+              </a:rPr>
+              <a:t>Local documents folder</a:t>
+            </a:r>
+          </a:p>
+        </p:txBody>
+      </p:sp>
+      <p:sp>
+        <p:nvSpPr>
+          <p:cNvPr id="43" name="TextBox 42"/>
+          <p:cNvSpPr txBox="1"/>
+          <p:nvPr/>
+        </p:nvSpPr>
+        <p:spPr>
+          <a:xfrm>
+            <a:off x="2999232" y="3703320"/>
+            <a:ext cx="2084831" cy="182880"/>
+          </a:xfrm>
+          <a:prstGeom prst="rect">
+            <a:avLst/>
+          </a:prstGeom>
+          <a:noFill/>
+        </p:spPr>
+        <p:txBody>
+          <a:bodyPr wrap="square" lIns="0" rIns="0" tIns="0" bIns="0" anchor="t">
+            <a:spAutoFit/>
+          </a:bodyPr>
+          <a:lstStyle/>
+          <a:p>
+            <a:pPr algn="l"/>
+            <a:r>
+              <a:rPr sz="800" b="0">
+                <a:solidFill>
+                  <a:srgbClr val="455560"/>
+                </a:solidFill>
+                <a:latin typeface="Consolas"/>
+              </a:rPr>
+              <a:t>STTM_LOCAL_SOURCE_DIR</a:t>
+            </a:r>
+          </a:p>
+        </p:txBody>
+      </p:sp>
+      <p:sp>
+        <p:nvSpPr>
+          <p:cNvPr id="44" name="TextBox 43"/>
+          <p:cNvSpPr txBox="1"/>
+          <p:nvPr/>
+        </p:nvSpPr>
+        <p:spPr>
+          <a:xfrm>
+            <a:off x="5102352" y="3703320"/>
+            <a:ext cx="914400" cy="182880"/>
+          </a:xfrm>
+          <a:prstGeom prst="rect">
+            <a:avLst/>
+          </a:prstGeom>
+          <a:noFill/>
+        </p:spPr>
+        <p:txBody>
+          <a:bodyPr wrap="square" lIns="0" rIns="0" tIns="0" bIns="0" anchor="t">
+            <a:spAutoFit/>
+          </a:bodyPr>
+          <a:lstStyle/>
+          <a:p>
+            <a:pPr algn="r"/>
+            <a:r>
+              <a:rPr sz="740" b="1" spc="80">
+                <a:solidFill>
+                  <a:srgbClr val="003DA5"/>
+                </a:solidFill>
+                <a:latin typeface="Segoe UI"/>
+              </a:rPr>
+              <a:t>LOCAL MODE</a:t>
+            </a:r>
+          </a:p>
+        </p:txBody>
+      </p:sp>
+      <p:sp>
+        <p:nvSpPr>
+          <p:cNvPr id="45" name="Rectangle 44"/>
+          <p:cNvSpPr/>
+          <p:nvPr/>
+        </p:nvSpPr>
+        <p:spPr>
+          <a:xfrm>
+            <a:off x="932688" y="3982212"/>
+            <a:ext cx="77724" cy="77724"/>
+          </a:xfrm>
+          <a:prstGeom prst="rect">
+            <a:avLst/>
+          </a:prstGeom>
+          <a:solidFill>
+            <a:srgbClr val="003DA5"/>
+          </a:solidFill>
+          <a:ln>
+            <a:noFill/>
+          </a:ln>
+          <a:effectLst/>
+        </p:spPr>
+        <p:style>
+          <a:lnRef idx="1">
+            <a:schemeClr val="accent1"/>
+          </a:lnRef>
+          <a:fillRef idx="3">
+            <a:schemeClr val="accent1"/>
+          </a:fillRef>
+          <a:effectRef idx="2">
+            <a:schemeClr val="accent1"/>
+          </a:effectRef>
+          <a:fontRef idx="minor">
+            <a:schemeClr val="lt1"/>
+          </a:fontRef>
+        </p:style>
+        <p:txBody>
+          <a:bodyPr rtlCol="0" anchor="ctr"/>
+          <a:lstStyle/>
+          <a:p/>
+        </p:txBody>
+      </p:sp>
+      <p:sp>
+        <p:nvSpPr>
+          <p:cNvPr id="46" name="TextBox 45"/>
+          <p:cNvSpPr txBox="1"/>
+          <p:nvPr/>
+        </p:nvSpPr>
+        <p:spPr>
+          <a:xfrm>
+            <a:off x="1188719" y="3913632"/>
+            <a:ext cx="1773936" cy="182880"/>
+          </a:xfrm>
+          <a:prstGeom prst="rect">
+            <a:avLst/>
+          </a:prstGeom>
+          <a:noFill/>
+        </p:spPr>
+        <p:txBody>
+          <a:bodyPr wrap="square" lIns="0" rIns="0" tIns="0" bIns="0" anchor="t">
+            <a:spAutoFit/>
+          </a:bodyPr>
+          <a:lstStyle/>
+          <a:p>
+            <a:pPr algn="l"/>
+            <a:r>
+              <a:rPr sz="919" b="1">
+                <a:solidFill>
+                  <a:srgbClr val="0A2458"/>
+                </a:solidFill>
+                <a:latin typeface="Segoe UI"/>
+              </a:rPr>
+              <a:t>Direct volume push</a:t>
+            </a:r>
+          </a:p>
+        </p:txBody>
+      </p:sp>
+      <p:sp>
+        <p:nvSpPr>
+          <p:cNvPr id="47" name="TextBox 46"/>
+          <p:cNvSpPr txBox="1"/>
+          <p:nvPr/>
+        </p:nvSpPr>
+        <p:spPr>
+          <a:xfrm>
+            <a:off x="2999232" y="3922776"/>
+            <a:ext cx="2084831" cy="182880"/>
+          </a:xfrm>
+          <a:prstGeom prst="rect">
+            <a:avLst/>
+          </a:prstGeom>
+          <a:noFill/>
+        </p:spPr>
+        <p:txBody>
+          <a:bodyPr wrap="square" lIns="0" rIns="0" tIns="0" bIns="0" anchor="t">
+            <a:spAutoFit/>
+          </a:bodyPr>
+          <a:lstStyle/>
+          <a:p>
+            <a:pPr algn="l"/>
+            <a:r>
+              <a:rPr sz="800" b="0">
+                <a:solidFill>
+                  <a:srgbClr val="455560"/>
+                </a:solidFill>
+                <a:latin typeface="Consolas"/>
+              </a:rPr>
+              <a:t>push_local_source_to_volumes.py</a:t>
+            </a:r>
+          </a:p>
+        </p:txBody>
+      </p:sp>
+      <p:sp>
+        <p:nvSpPr>
+          <p:cNvPr id="48" name="TextBox 47"/>
+          <p:cNvSpPr txBox="1"/>
+          <p:nvPr/>
+        </p:nvSpPr>
+        <p:spPr>
+          <a:xfrm>
+            <a:off x="5102352" y="3922776"/>
+            <a:ext cx="914400" cy="182880"/>
+          </a:xfrm>
+          <a:prstGeom prst="rect">
+            <a:avLst/>
+          </a:prstGeom>
+          <a:noFill/>
+        </p:spPr>
+        <p:txBody>
+          <a:bodyPr wrap="square" lIns="0" rIns="0" tIns="0" bIns="0" anchor="t">
+            <a:spAutoFit/>
+          </a:bodyPr>
+          <a:lstStyle/>
+          <a:p>
+            <a:pPr algn="r"/>
+            <a:r>
+              <a:rPr sz="740" b="1" spc="80">
+                <a:solidFill>
+                  <a:srgbClr val="003DA5"/>
+                </a:solidFill>
+                <a:latin typeface="Segoe UI"/>
+              </a:rPr>
+              <a:t>IN USE TODAY</a:t>
+            </a:r>
+          </a:p>
+        </p:txBody>
+      </p:sp>
+      <p:cxnSp>
+        <p:nvCxnSpPr>
+          <p:cNvPr id="49" name="Connector 48"/>
+          <p:cNvCxnSpPr/>
+          <p:nvPr/>
+        </p:nvCxnSpPr>
+        <p:spPr>
+          <a:xfrm>
+            <a:off x="6163055" y="3557016"/>
+            <a:ext cx="402337" cy="0"/>
+          </a:xfrm>
+          <a:prstGeom prst="line">
+            <a:avLst/>
+          </a:prstGeom>
+          <a:ln w="25400">
+            <a:solidFill>
+              <a:srgbClr val="0A2458"/>
+            </a:solidFill>
+            <a:tailEnd type="triangle" w="med" len="med"/>
+          </a:ln>
+        </p:spPr>
+        <p:style>
+          <a:lnRef idx="2">
+            <a:schemeClr val="accent1"/>
+          </a:lnRef>
+          <a:fillRef idx="0">
+            <a:schemeClr val="accent1"/>
+          </a:fillRef>
+          <a:effectRef idx="1">
+            <a:schemeClr val="accent1"/>
+          </a:effectRef>
+          <a:fontRef idx="minor">
+            <a:schemeClr val="tx1"/>
+          </a:fontRef>
+        </p:style>
+      </p:cxnSp>
+      <p:sp>
+        <p:nvSpPr>
+          <p:cNvPr id="50" name="Rectangle 49"/>
+          <p:cNvSpPr/>
+          <p:nvPr/>
+        </p:nvSpPr>
+        <p:spPr>
+          <a:xfrm>
+            <a:off x="6693407" y="3145536"/>
+            <a:ext cx="4620463" cy="822960"/>
+          </a:xfrm>
+          <a:prstGeom prst="rect">
+            <a:avLst/>
+          </a:prstGeom>
+          <a:solidFill>
+            <a:srgbClr val="FFFFFF"/>
+          </a:solidFill>
+          <a:ln w="12700">
+            <a:solidFill>
+              <a:srgbClr val="0A2458"/>
+            </a:solidFill>
+          </a:ln>
+          <a:effectLst/>
+        </p:spPr>
+        <p:style>
+          <a:lnRef idx="1">
+            <a:schemeClr val="accent1"/>
+          </a:lnRef>
+          <a:fillRef idx="3">
+            <a:schemeClr val="accent1"/>
+          </a:fillRef>
+          <a:effectRef idx="2">
+            <a:schemeClr val="accent1"/>
+          </a:effectRef>
+          <a:fontRef idx="minor">
+            <a:schemeClr val="lt1"/>
+          </a:fontRef>
+        </p:style>
+        <p:txBody>
+          <a:bodyPr rtlCol="0" anchor="ctr"/>
+          <a:lstStyle/>
+          <a:p/>
         </p:txBody>
       </p:sp>
       <p:pic>
         <p:nvPicPr>
-          <p:cNvPr id="26" name="Picture 25" descr="entra.png"/>
+          <p:cNvPr id="51" name="Picture 50" descr="unitycatalog.png"/>
           <p:cNvPicPr>
             <a:picLocks noChangeAspect="1"/>
           </p:cNvPicPr>
@@ -3942,8 +4939,8 @@
         </p:blipFill>
         <p:spPr>
           <a:xfrm>
-            <a:off x="10104119" y="1761966"/>
-            <a:ext cx="457200" cy="407987"/>
+            <a:off x="7022522" y="3273552"/>
+            <a:ext cx="695083" cy="237744"/>
           </a:xfrm>
           <a:prstGeom prst="rect">
             <a:avLst/>
@@ -3952,14 +4949,14 @@
       </p:pic>
       <p:sp>
         <p:nvSpPr>
-          <p:cNvPr id="27" name="TextBox 26"/>
+          <p:cNvPr id="52" name="TextBox 51"/>
           <p:cNvSpPr txBox="1"/>
           <p:nvPr/>
         </p:nvSpPr>
         <p:spPr>
           <a:xfrm>
-            <a:off x="10652760" y="1691640"/>
-            <a:ext cx="1005840" cy="548640"/>
+            <a:off x="8028431" y="3273552"/>
+            <a:ext cx="3139135" cy="201168"/>
           </a:xfrm>
           <a:prstGeom prst="rect">
             <a:avLst/>
@@ -3972,74 +4969,117 @@
           </a:bodyPr>
           <a:lstStyle/>
           <a:p>
-            <a:pPr algn="l">
-              <a:lnSpc>
-                <a:spcPct val="100000"/>
-              </a:lnSpc>
-            </a:pPr>
-            <a:r>
-              <a:rPr sz="850" b="1">
-                <a:solidFill>
-                  <a:srgbClr val="1C2127"/>
-                </a:solidFill>
-                <a:latin typeface="Calibri"/>
+            <a:pPr algn="l"/>
+            <a:r>
+              <a:rPr sz="940" b="1">
+                <a:solidFill>
+                  <a:srgbClr val="0A2458"/>
+                </a:solidFill>
+                <a:latin typeface="Segoe UI"/>
               </a:rPr>
-              <a:t>Entra ID app</a:t>
-            </a:r>
-          </a:p>
-          <a:p>
-            <a:pPr algn="l">
-              <a:lnSpc>
-                <a:spcPct val="100000"/>
-              </a:lnSpc>
-            </a:pPr>
-            <a:r>
-              <a:rPr sz="850" b="0">
-                <a:solidFill>
-                  <a:srgbClr val="2F343C"/>
-                </a:solidFill>
-                <a:latin typeface="Calibri"/>
+              <a:t>Unity Catalog — volumes + Delta</a:t>
+            </a:r>
+          </a:p>
+        </p:txBody>
+      </p:sp>
+      <p:sp>
+        <p:nvSpPr>
+          <p:cNvPr id="53" name="TextBox 52"/>
+          <p:cNvSpPr txBox="1"/>
+          <p:nvPr/>
+        </p:nvSpPr>
+        <p:spPr>
+          <a:xfrm>
+            <a:off x="6839712" y="3566160"/>
+            <a:ext cx="4327855" cy="201168"/>
+          </a:xfrm>
+          <a:prstGeom prst="rect">
+            <a:avLst/>
+          </a:prstGeom>
+          <a:noFill/>
+        </p:spPr>
+        <p:txBody>
+          <a:bodyPr wrap="square" lIns="0" rIns="0" tIns="0" bIns="0" anchor="t">
+            <a:spAutoFit/>
+          </a:bodyPr>
+          <a:lstStyle/>
+          <a:p>
+            <a:pPr algn="l"/>
+            <a:r>
+              <a:rPr sz="819" b="1">
+                <a:solidFill>
+                  <a:srgbClr val="003DA5"/>
+                </a:solidFill>
+                <a:latin typeface="Consolas"/>
               </a:rPr>
-              <a:t>Microsoft Graph</a:t>
-            </a:r>
-          </a:p>
-          <a:p>
-            <a:pPr algn="l">
-              <a:lnSpc>
-                <a:spcPct val="100000"/>
-              </a:lnSpc>
-            </a:pPr>
-            <a:r>
-              <a:rPr sz="850" b="0">
-                <a:solidFill>
-                  <a:srgbClr val="2F343C"/>
-                </a:solidFill>
-                <a:latin typeface="Calibri"/>
+              <a:t>frd_raw · sttm_reference · sttm_out_app · sttm_audit</a:t>
+            </a:r>
+          </a:p>
+        </p:txBody>
+      </p:sp>
+      <p:sp>
+        <p:nvSpPr>
+          <p:cNvPr id="54" name="TextBox 53"/>
+          <p:cNvSpPr txBox="1"/>
+          <p:nvPr/>
+        </p:nvSpPr>
+        <p:spPr>
+          <a:xfrm>
+            <a:off x="6839712" y="3767328"/>
+            <a:ext cx="4327855" cy="201168"/>
+          </a:xfrm>
+          <a:prstGeom prst="rect">
+            <a:avLst/>
+          </a:prstGeom>
+          <a:noFill/>
+        </p:spPr>
+        <p:txBody>
+          <a:bodyPr wrap="square" lIns="0" rIns="0" tIns="0" bIns="0" anchor="t">
+            <a:spAutoFit/>
+          </a:bodyPr>
+          <a:lstStyle/>
+          <a:p>
+            <a:pPr algn="l"/>
+            <a:r>
+              <a:rPr sz="840" b="1">
+                <a:solidFill>
+                  <a:srgbClr val="0A2458"/>
+                </a:solidFill>
+                <a:latin typeface="Segoe UI"/>
               </a:rPr>
-              <a:t>Sites.Selected · read</a:t>
+              <a:t>The review app reads THIS.</a:t>
+            </a:r>
+            <a:r>
+              <a:rPr sz="840" b="0">
+                <a:solidFill>
+                  <a:srgbClr val="333F48"/>
+                </a:solidFill>
+                <a:latin typeface="Segoe UI"/>
+              </a:rPr>
+              <a:t>  SharePoint is not on the request path.</a:t>
             </a:r>
           </a:p>
         </p:txBody>
       </p:sp>
       <p:cxnSp>
         <p:nvCxnSpPr>
-          <p:cNvPr id="28" name="Connector 27"/>
+          <p:cNvPr id="55" name="Connector 54"/>
           <p:cNvCxnSpPr/>
           <p:nvPr/>
         </p:nvCxnSpPr>
         <p:spPr>
           <a:xfrm>
-            <a:off x="4389120" y="2395728"/>
-            <a:ext cx="0" cy="393192"/>
+            <a:off x="2670048" y="4169664"/>
+            <a:ext cx="0" cy="146304"/>
           </a:xfrm>
           <a:prstGeom prst="line">
             <a:avLst/>
           </a:prstGeom>
-          <a:ln w="19050">
+          <a:ln w="22225">
             <a:solidFill>
-              <a:srgbClr val="2F343C"/>
+              <a:srgbClr val="0A2458"/>
             </a:solidFill>
-            <a:tailEnd type="triangle" w="sm" len="sm"/>
+            <a:tailEnd type="triangle" w="med" len="med"/>
           </a:ln>
         </p:spPr>
         <p:style>
@@ -4059,14 +5099,14 @@
       </p:cxnSp>
       <p:sp>
         <p:nvSpPr>
-          <p:cNvPr id="29" name="TextBox 28"/>
+          <p:cNvPr id="56" name="TextBox 55"/>
           <p:cNvSpPr txBox="1"/>
           <p:nvPr/>
         </p:nvSpPr>
         <p:spPr>
           <a:xfrm>
-            <a:off x="4517136" y="2491740"/>
-            <a:ext cx="7132320" cy="201168"/>
+            <a:off x="2852928" y="4142232"/>
+            <a:ext cx="9046159" cy="219456"/>
           </a:xfrm>
           <a:prstGeom prst="rect">
             <a:avLst/>
@@ -4083,38 +5123,34 @@
             <a:r>
               <a:rPr sz="950" b="1">
                 <a:solidFill>
-                  <a:srgbClr val="2F343C"/>
-                </a:solidFill>
-                <a:latin typeface="Calibri"/>
+                  <a:srgbClr val="333F48"/>
+                </a:solidFill>
+                <a:latin typeface="Segoe UI"/>
               </a:rPr>
-              <a:t>00  sync on app start-up — imports every FRD_* / STTM_* not yet in Unity Catalog · never writes back</a:t>
-            </a:r>
-          </a:p>
-        </p:txBody>
-      </p:sp>
-      <p:sp>
-        <p:nvSpPr>
-          <p:cNvPr id="30" name="Rounded Rectangle 29"/>
+              <a:t>the app triggers the job; the job reads and writes the volumes natively</a:t>
+            </a:r>
+          </a:p>
+        </p:txBody>
+      </p:sp>
+      <p:sp>
+        <p:nvSpPr>
+          <p:cNvPr id="57" name="Rectangle 56"/>
           <p:cNvSpPr/>
           <p:nvPr/>
         </p:nvSpPr>
         <p:spPr>
           <a:xfrm>
-            <a:off x="548640" y="2788920"/>
-            <a:ext cx="11094415" cy="2395728"/>
-          </a:xfrm>
-          <a:prstGeom prst="roundRect">
-            <a:avLst>
-              <a:gd name="adj" fmla="val 2500"/>
-            </a:avLst>
+            <a:off x="658368" y="4315968"/>
+            <a:ext cx="10874959" cy="1609344"/>
+          </a:xfrm>
+          <a:prstGeom prst="rect">
+            <a:avLst/>
           </a:prstGeom>
           <a:solidFill>
-            <a:srgbClr val="F6F7F9"/>
+            <a:srgbClr val="F0F0F0"/>
           </a:solidFill>
-          <a:ln w="9525">
-            <a:solidFill>
-              <a:srgbClr val="D3D8DE"/>
-            </a:solidFill>
+          <a:ln>
+            <a:noFill/>
           </a:ln>
           <a:effectLst/>
         </p:spPr>
@@ -4140,14 +5176,56 @@
       </p:sp>
       <p:sp>
         <p:nvSpPr>
-          <p:cNvPr id="31" name="TextBox 30"/>
+          <p:cNvPr id="58" name="Rectangle 57"/>
+          <p:cNvSpPr/>
+          <p:nvPr/>
+        </p:nvSpPr>
+        <p:spPr>
+          <a:xfrm>
+            <a:off x="658368" y="4315968"/>
+            <a:ext cx="45720" cy="1609344"/>
+          </a:xfrm>
+          <a:prstGeom prst="rect">
+            <a:avLst/>
+          </a:prstGeom>
+          <a:solidFill>
+            <a:srgbClr val="003DA5"/>
+          </a:solidFill>
+          <a:ln>
+            <a:noFill/>
+          </a:ln>
+          <a:effectLst/>
+        </p:spPr>
+        <p:style>
+          <a:lnRef idx="1">
+            <a:schemeClr val="accent1"/>
+          </a:lnRef>
+          <a:fillRef idx="3">
+            <a:schemeClr val="accent1"/>
+          </a:fillRef>
+          <a:effectRef idx="2">
+            <a:schemeClr val="accent1"/>
+          </a:effectRef>
+          <a:fontRef idx="minor">
+            <a:schemeClr val="lt1"/>
+          </a:fontRef>
+        </p:style>
+        <p:txBody>
+          <a:bodyPr rtlCol="0" anchor="ctr"/>
+          <a:lstStyle/>
+          <a:p/>
+        </p:txBody>
+      </p:sp>
+      <p:sp>
+        <p:nvSpPr>
+          <p:cNvPr id="59" name="TextBox 58"/>
           <p:cNvSpPr txBox="1"/>
           <p:nvPr/>
         </p:nvSpPr>
         <p:spPr>
           <a:xfrm>
-            <a:off x="777240" y="2898648"/>
-            <a:ext cx="3657600" cy="201168"/>
+            <a:off x="877824" y="4434840"/>
+            <a:ext cx="4572000" cy="182880"/>
           </a:xfrm>
           <a:prstGeom prst="rect">
             <a:avLst/>
@@ -4162,20 +5240,20 @@
           <a:p>
             <a:pPr algn="l"/>
             <a:r>
-              <a:rPr sz="900" b="1" spc="140">
-                <a:solidFill>
-                  <a:srgbClr val="007067"/>
-                </a:solidFill>
-                <a:latin typeface="Calibri"/>
+              <a:rPr sz="850" b="1" spc="140">
+                <a:solidFill>
+                  <a:srgbClr val="003DA5"/>
+                </a:solidFill>
+                <a:latin typeface="Segoe UI"/>
               </a:rPr>
-              <a:t>DATA PLATFORM</a:t>
+              <a:t>DATABRICKS PLATFORM</a:t>
             </a:r>
           </a:p>
         </p:txBody>
       </p:sp>
       <p:pic>
         <p:nvPicPr>
-          <p:cNvPr id="32" name="Picture 31" descr="databricks.png"/>
+          <p:cNvPr id="60" name="Picture 59" descr="databricks.png"/>
           <p:cNvPicPr>
             <a:picLocks noChangeAspect="1"/>
           </p:cNvPicPr>
@@ -4189,8 +5267,8 @@
         </p:blipFill>
         <p:spPr>
           <a:xfrm>
-            <a:off x="1071020" y="3063239"/>
-            <a:ext cx="784039" cy="438912"/>
+            <a:off x="1177544" y="4700016"/>
+            <a:ext cx="424688" cy="237744"/>
           </a:xfrm>
           <a:prstGeom prst="rect">
             <a:avLst/>
@@ -4199,70 +5277,24 @@
       </p:pic>
       <p:sp>
         <p:nvSpPr>
-          <p:cNvPr id="33" name="TextBox 32"/>
-          <p:cNvSpPr txBox="1"/>
-          <p:nvPr/>
-        </p:nvSpPr>
-        <p:spPr>
-          <a:xfrm>
-            <a:off x="2240280" y="3118103"/>
-            <a:ext cx="5943600" cy="274320"/>
-          </a:xfrm>
-          <a:prstGeom prst="rect">
-            <a:avLst/>
-          </a:prstGeom>
-          <a:noFill/>
-        </p:spPr>
-        <p:txBody>
-          <a:bodyPr wrap="square" lIns="0" rIns="0" tIns="0" bIns="0" anchor="t">
-            <a:spAutoFit/>
-          </a:bodyPr>
-          <a:lstStyle/>
-          <a:p>
-            <a:pPr algn="l"/>
-            <a:r>
-              <a:rPr sz="1200" b="1">
-                <a:solidFill>
-                  <a:srgbClr val="1C2127"/>
-                </a:solidFill>
-                <a:latin typeface="Calibri"/>
-              </a:rPr>
-              <a:t>Databricks</a:t>
-            </a:r>
-            <a:r>
-              <a:rPr sz="1000" b="0">
-                <a:solidFill>
-                  <a:srgbClr val="2F343C"/>
-                </a:solidFill>
-                <a:latin typeface="Calibri"/>
-              </a:rPr>
-              <a:t>   — Jobs run the pipeline, Apps serve the reviewer, Unity Catalog holds every file and table.</a:t>
-            </a:r>
-          </a:p>
-        </p:txBody>
-      </p:sp>
-      <p:sp>
-        <p:nvSpPr>
-          <p:cNvPr id="34" name="Rounded Rectangle 33"/>
+          <p:cNvPr id="61" name="Rectangle 60"/>
           <p:cNvSpPr/>
           <p:nvPr/>
         </p:nvSpPr>
         <p:spPr>
           <a:xfrm>
-            <a:off x="777240" y="3566160"/>
-            <a:ext cx="3063240" cy="1463040"/>
-          </a:xfrm>
-          <a:prstGeom prst="roundRect">
-            <a:avLst>
-              <a:gd name="adj" fmla="val 4000"/>
-            </a:avLst>
+            <a:off x="2103120" y="4553712"/>
+            <a:ext cx="5888736" cy="932688"/>
+          </a:xfrm>
+          <a:prstGeom prst="rect">
+            <a:avLst/>
           </a:prstGeom>
           <a:solidFill>
-            <a:srgbClr val="EDEFF2"/>
+            <a:srgbClr val="FFFFFF"/>
           </a:solidFill>
-          <a:ln w="9525">
+          <a:ln w="12700">
             <a:solidFill>
-              <a:srgbClr val="C5CBD3"/>
+              <a:srgbClr val="CDD2D8"/>
             </a:solidFill>
           </a:ln>
           <a:effectLst/>
@@ -4287,9 +5319,387 @@
           <a:p/>
         </p:txBody>
       </p:sp>
+      <p:sp>
+        <p:nvSpPr>
+          <p:cNvPr id="62" name="TextBox 61"/>
+          <p:cNvSpPr txBox="1"/>
+          <p:nvPr/>
+        </p:nvSpPr>
+        <p:spPr>
+          <a:xfrm>
+            <a:off x="2249424" y="4626864"/>
+            <a:ext cx="5596128" cy="182880"/>
+          </a:xfrm>
+          <a:prstGeom prst="rect">
+            <a:avLst/>
+          </a:prstGeom>
+          <a:noFill/>
+        </p:spPr>
+        <p:txBody>
+          <a:bodyPr wrap="square" lIns="0" rIns="0" tIns="0" bIns="0" anchor="t">
+            <a:spAutoFit/>
+          </a:bodyPr>
+          <a:lstStyle/>
+          <a:p>
+            <a:pPr algn="l"/>
+            <a:r>
+              <a:rPr sz="1000" b="1">
+                <a:solidFill>
+                  <a:srgbClr val="0A2458"/>
+                </a:solidFill>
+                <a:latin typeface="Segoe UI"/>
+              </a:rPr>
+              <a:t>Generation job</a:t>
+            </a:r>
+            <a:r>
+              <a:rPr sz="840" b="0">
+                <a:solidFill>
+                  <a:srgbClr val="333F48"/>
+                </a:solidFill>
+                <a:latin typeface="Segoe UI"/>
+              </a:rPr>
+              <a:t>   Databricks Jobs · serverless · stages 01–04</a:t>
+            </a:r>
+          </a:p>
+        </p:txBody>
+      </p:sp>
+      <p:sp>
+        <p:nvSpPr>
+          <p:cNvPr id="63" name="Rectangle 62"/>
+          <p:cNvSpPr/>
+          <p:nvPr/>
+        </p:nvSpPr>
+        <p:spPr>
+          <a:xfrm>
+            <a:off x="2249424" y="4846320"/>
+            <a:ext cx="1337310" cy="566928"/>
+          </a:xfrm>
+          <a:prstGeom prst="rect">
+            <a:avLst/>
+          </a:prstGeom>
+          <a:solidFill>
+            <a:srgbClr val="F0F0F0"/>
+          </a:solidFill>
+          <a:ln w="12700">
+            <a:solidFill>
+              <a:srgbClr val="CDD2D8"/>
+            </a:solidFill>
+          </a:ln>
+          <a:effectLst/>
+        </p:spPr>
+        <p:style>
+          <a:lnRef idx="1">
+            <a:schemeClr val="accent1"/>
+          </a:lnRef>
+          <a:fillRef idx="3">
+            <a:schemeClr val="accent1"/>
+          </a:fillRef>
+          <a:effectRef idx="2">
+            <a:schemeClr val="accent1"/>
+          </a:effectRef>
+          <a:fontRef idx="minor">
+            <a:schemeClr val="lt1"/>
+          </a:fontRef>
+        </p:style>
+        <p:txBody>
+          <a:bodyPr rtlCol="0" anchor="ctr"/>
+          <a:lstStyle/>
+          <a:p/>
+        </p:txBody>
+      </p:sp>
+      <p:sp>
+        <p:nvSpPr>
+          <p:cNvPr id="64" name="TextBox 63"/>
+          <p:cNvSpPr txBox="1"/>
+          <p:nvPr/>
+        </p:nvSpPr>
+        <p:spPr>
+          <a:xfrm>
+            <a:off x="2340864" y="4901183"/>
+            <a:ext cx="1154430" cy="164592"/>
+          </a:xfrm>
+          <a:prstGeom prst="rect">
+            <a:avLst/>
+          </a:prstGeom>
+          <a:noFill/>
+        </p:spPr>
+        <p:txBody>
+          <a:bodyPr wrap="square" lIns="0" rIns="0" tIns="0" bIns="0" anchor="t">
+            <a:spAutoFit/>
+          </a:bodyPr>
+          <a:lstStyle/>
+          <a:p>
+            <a:pPr algn="l"/>
+            <a:r>
+              <a:rPr sz="850" b="1">
+                <a:solidFill>
+                  <a:srgbClr val="003DA5"/>
+                </a:solidFill>
+                <a:latin typeface="Consolas"/>
+              </a:rPr>
+              <a:t>01</a:t>
+            </a:r>
+          </a:p>
+        </p:txBody>
+      </p:sp>
+      <p:sp>
+        <p:nvSpPr>
+          <p:cNvPr id="65" name="TextBox 64"/>
+          <p:cNvSpPr txBox="1"/>
+          <p:nvPr/>
+        </p:nvSpPr>
+        <p:spPr>
+          <a:xfrm>
+            <a:off x="2340864" y="5056632"/>
+            <a:ext cx="1154430" cy="182880"/>
+          </a:xfrm>
+          <a:prstGeom prst="rect">
+            <a:avLst/>
+          </a:prstGeom>
+          <a:noFill/>
+        </p:spPr>
+        <p:txBody>
+          <a:bodyPr wrap="square" lIns="0" rIns="0" tIns="0" bIns="0" anchor="t">
+            <a:spAutoFit/>
+          </a:bodyPr>
+          <a:lstStyle/>
+          <a:p>
+            <a:pPr algn="l"/>
+            <a:r>
+              <a:rPr sz="940" b="1">
+                <a:solidFill>
+                  <a:srgbClr val="0A2458"/>
+                </a:solidFill>
+                <a:latin typeface="Segoe UI"/>
+              </a:rPr>
+              <a:t>Ingest</a:t>
+            </a:r>
+          </a:p>
+        </p:txBody>
+      </p:sp>
+      <p:sp>
+        <p:nvSpPr>
+          <p:cNvPr id="66" name="TextBox 65"/>
+          <p:cNvSpPr txBox="1"/>
+          <p:nvPr/>
+        </p:nvSpPr>
+        <p:spPr>
+          <a:xfrm>
+            <a:off x="2340864" y="5239512"/>
+            <a:ext cx="1154430" cy="164592"/>
+          </a:xfrm>
+          <a:prstGeom prst="rect">
+            <a:avLst/>
+          </a:prstGeom>
+          <a:noFill/>
+        </p:spPr>
+        <p:txBody>
+          <a:bodyPr wrap="square" lIns="0" rIns="0" tIns="0" bIns="0" anchor="t">
+            <a:spAutoFit/>
+          </a:bodyPr>
+          <a:lstStyle/>
+          <a:p>
+            <a:pPr algn="l"/>
+            <a:r>
+              <a:rPr sz="740" b="0">
+                <a:solidFill>
+                  <a:srgbClr val="455560"/>
+                </a:solidFill>
+                <a:latin typeface="Segoe UI"/>
+              </a:rPr>
+              <a:t>docx → markdown</a:t>
+            </a:r>
+          </a:p>
+        </p:txBody>
+      </p:sp>
+      <p:cxnSp>
+        <p:nvCxnSpPr>
+          <p:cNvPr id="67" name="Connector 66"/>
+          <p:cNvCxnSpPr/>
+          <p:nvPr/>
+        </p:nvCxnSpPr>
+        <p:spPr>
+          <a:xfrm>
+            <a:off x="3591306" y="5129783"/>
+            <a:ext cx="73152" cy="0"/>
+          </a:xfrm>
+          <a:prstGeom prst="line">
+            <a:avLst/>
+          </a:prstGeom>
+          <a:ln w="12700">
+            <a:solidFill>
+              <a:srgbClr val="455560"/>
+            </a:solidFill>
+            <a:tailEnd type="triangle" w="med" len="med"/>
+          </a:ln>
+        </p:spPr>
+        <p:style>
+          <a:lnRef idx="2">
+            <a:schemeClr val="accent1"/>
+          </a:lnRef>
+          <a:fillRef idx="0">
+            <a:schemeClr val="accent1"/>
+          </a:fillRef>
+          <a:effectRef idx="1">
+            <a:schemeClr val="accent1"/>
+          </a:effectRef>
+          <a:fontRef idx="minor">
+            <a:schemeClr val="tx1"/>
+          </a:fontRef>
+        </p:style>
+      </p:cxnSp>
+      <p:sp>
+        <p:nvSpPr>
+          <p:cNvPr id="68" name="Rectangle 67"/>
+          <p:cNvSpPr/>
+          <p:nvPr/>
+        </p:nvSpPr>
+        <p:spPr>
+          <a:xfrm>
+            <a:off x="3669030" y="4846320"/>
+            <a:ext cx="1337310" cy="566928"/>
+          </a:xfrm>
+          <a:prstGeom prst="rect">
+            <a:avLst/>
+          </a:prstGeom>
+          <a:solidFill>
+            <a:srgbClr val="FCECEE"/>
+          </a:solidFill>
+          <a:ln w="15875">
+            <a:solidFill>
+              <a:srgbClr val="D2202F"/>
+            </a:solidFill>
+          </a:ln>
+          <a:effectLst/>
+        </p:spPr>
+        <p:style>
+          <a:lnRef idx="1">
+            <a:schemeClr val="accent1"/>
+          </a:lnRef>
+          <a:fillRef idx="3">
+            <a:schemeClr val="accent1"/>
+          </a:fillRef>
+          <a:effectRef idx="2">
+            <a:schemeClr val="accent1"/>
+          </a:effectRef>
+          <a:fontRef idx="minor">
+            <a:schemeClr val="lt1"/>
+          </a:fontRef>
+        </p:style>
+        <p:txBody>
+          <a:bodyPr rtlCol="0" anchor="ctr"/>
+          <a:lstStyle/>
+          <a:p/>
+        </p:txBody>
+      </p:sp>
+      <p:sp>
+        <p:nvSpPr>
+          <p:cNvPr id="69" name="TextBox 68"/>
+          <p:cNvSpPr txBox="1"/>
+          <p:nvPr/>
+        </p:nvSpPr>
+        <p:spPr>
+          <a:xfrm>
+            <a:off x="3760470" y="4901183"/>
+            <a:ext cx="1154430" cy="164592"/>
+          </a:xfrm>
+          <a:prstGeom prst="rect">
+            <a:avLst/>
+          </a:prstGeom>
+          <a:noFill/>
+        </p:spPr>
+        <p:txBody>
+          <a:bodyPr wrap="square" lIns="0" rIns="0" tIns="0" bIns="0" anchor="t">
+            <a:spAutoFit/>
+          </a:bodyPr>
+          <a:lstStyle/>
+          <a:p>
+            <a:pPr algn="l"/>
+            <a:r>
+              <a:rPr sz="850" b="1">
+                <a:solidFill>
+                  <a:srgbClr val="D2202F"/>
+                </a:solidFill>
+                <a:latin typeface="Consolas"/>
+              </a:rPr>
+              <a:t>02</a:t>
+            </a:r>
+          </a:p>
+        </p:txBody>
+      </p:sp>
+      <p:sp>
+        <p:nvSpPr>
+          <p:cNvPr id="70" name="TextBox 69"/>
+          <p:cNvSpPr txBox="1"/>
+          <p:nvPr/>
+        </p:nvSpPr>
+        <p:spPr>
+          <a:xfrm>
+            <a:off x="3760470" y="5056632"/>
+            <a:ext cx="1154430" cy="182880"/>
+          </a:xfrm>
+          <a:prstGeom prst="rect">
+            <a:avLst/>
+          </a:prstGeom>
+          <a:noFill/>
+        </p:spPr>
+        <p:txBody>
+          <a:bodyPr wrap="square" lIns="0" rIns="0" tIns="0" bIns="0" anchor="t">
+            <a:spAutoFit/>
+          </a:bodyPr>
+          <a:lstStyle/>
+          <a:p>
+            <a:pPr algn="l"/>
+            <a:r>
+              <a:rPr sz="940" b="1">
+                <a:solidFill>
+                  <a:srgbClr val="0A2458"/>
+                </a:solidFill>
+                <a:latin typeface="Segoe UI"/>
+              </a:rPr>
+              <a:t>Extract</a:t>
+            </a:r>
+          </a:p>
+        </p:txBody>
+      </p:sp>
+      <p:sp>
+        <p:nvSpPr>
+          <p:cNvPr id="71" name="TextBox 70"/>
+          <p:cNvSpPr txBox="1"/>
+          <p:nvPr/>
+        </p:nvSpPr>
+        <p:spPr>
+          <a:xfrm>
+            <a:off x="3760470" y="5239512"/>
+            <a:ext cx="1154430" cy="164592"/>
+          </a:xfrm>
+          <a:prstGeom prst="rect">
+            <a:avLst/>
+          </a:prstGeom>
+          <a:noFill/>
+        </p:spPr>
+        <p:txBody>
+          <a:bodyPr wrap="square" lIns="0" rIns="0" tIns="0" bIns="0" anchor="t">
+            <a:spAutoFit/>
+          </a:bodyPr>
+          <a:lstStyle/>
+          <a:p>
+            <a:pPr algn="l"/>
+            <a:r>
+              <a:rPr sz="740" b="0">
+                <a:solidFill>
+                  <a:srgbClr val="D2202F"/>
+                </a:solidFill>
+                <a:latin typeface="Segoe UI"/>
+              </a:rPr>
+              <a:t>the one model call</a:t>
+            </a:r>
+          </a:p>
+        </p:txBody>
+      </p:sp>
       <p:pic>
         <p:nvPicPr>
-          <p:cNvPr id="35" name="Picture 34" descr="unitycatalog.png"/>
+          <p:cNvPr id="72" name="Picture 71" descr="claude.png"/>
           <p:cNvPicPr>
             <a:picLocks noChangeAspect="1"/>
           </p:cNvPicPr>
@@ -4303,363 +5713,33 @@
         </p:blipFill>
         <p:spPr>
           <a:xfrm>
-            <a:off x="989890" y="3712463"/>
-            <a:ext cx="1229763" cy="420624"/>
+            <a:off x="4439412" y="4904041"/>
+            <a:ext cx="475488" cy="104013"/>
           </a:xfrm>
           <a:prstGeom prst="rect">
             <a:avLst/>
           </a:prstGeom>
         </p:spPr>
       </p:pic>
-      <p:sp>
-        <p:nvSpPr>
-          <p:cNvPr id="36" name="TextBox 35"/>
-          <p:cNvSpPr txBox="1"/>
-          <p:nvPr/>
-        </p:nvSpPr>
-        <p:spPr>
-          <a:xfrm>
-            <a:off x="941832" y="4224528"/>
-            <a:ext cx="2734056" cy="731520"/>
-          </a:xfrm>
-          <a:prstGeom prst="rect">
-            <a:avLst/>
-          </a:prstGeom>
-          <a:noFill/>
-        </p:spPr>
-        <p:txBody>
-          <a:bodyPr wrap="square" lIns="0" rIns="0" tIns="0" bIns="0" anchor="t">
-            <a:spAutoFit/>
-          </a:bodyPr>
-          <a:lstStyle/>
-          <a:p>
-            <a:pPr algn="l">
-              <a:lnSpc>
-                <a:spcPct val="106000"/>
-              </a:lnSpc>
-            </a:pPr>
-            <a:r>
-              <a:rPr sz="950" b="1">
-                <a:solidFill>
-                  <a:srgbClr val="1C2127"/>
-                </a:solidFill>
-                <a:latin typeface="Calibri"/>
-              </a:rPr>
-              <a:t>Volumes</a:t>
-            </a:r>
-            <a:r>
-              <a:rPr sz="950" b="0">
-                <a:solidFill>
-                  <a:srgbClr val="2F343C"/>
-                </a:solidFill>
-                <a:latin typeface="Calibri"/>
-              </a:rPr>
-              <a:t>  —  FRDs, approved STTMs, the corpus index, every run's artifacts</a:t>
-            </a:r>
-          </a:p>
-          <a:p>
-            <a:pPr algn="l">
-              <a:lnSpc>
-                <a:spcPct val="106000"/>
-              </a:lnSpc>
-            </a:pPr>
-            <a:r>
-              <a:rPr sz="850" b="1">
-                <a:solidFill>
-                  <a:srgbClr val="007067"/>
-                </a:solidFill>
-                <a:latin typeface="Consolas"/>
-              </a:rPr>
-              <a:t>frd_raw · sttm_reference · sttm_out</a:t>
-            </a:r>
-          </a:p>
-          <a:p>
-            <a:pPr algn="l">
-              <a:lnSpc>
-                <a:spcPct val="106000"/>
-              </a:lnSpc>
-            </a:pPr>
-            <a:r>
-              <a:rPr sz="950" b="1">
-                <a:solidFill>
-                  <a:srgbClr val="1C2127"/>
-                </a:solidFill>
-                <a:latin typeface="Calibri"/>
-              </a:rPr>
-              <a:t>Delta tables</a:t>
-            </a:r>
-            <a:r>
-              <a:rPr sz="950" b="0">
-                <a:solidFill>
-                  <a:srgbClr val="2F343C"/>
-                </a:solidFill>
-                <a:latin typeface="Calibri"/>
-              </a:rPr>
-              <a:t>  —  run history and contracts</a:t>
-            </a:r>
-          </a:p>
-        </p:txBody>
-      </p:sp>
-      <p:sp>
-        <p:nvSpPr>
-          <p:cNvPr id="37" name="Rounded Rectangle 36"/>
-          <p:cNvSpPr/>
-          <p:nvPr/>
-        </p:nvSpPr>
-        <p:spPr>
-          <a:xfrm>
-            <a:off x="4023360" y="3566160"/>
-            <a:ext cx="4892040" cy="1463040"/>
-          </a:xfrm>
-          <a:prstGeom prst="roundRect">
-            <a:avLst>
-              <a:gd name="adj" fmla="val 4000"/>
-            </a:avLst>
-          </a:prstGeom>
-          <a:solidFill>
-            <a:srgbClr val="EDEFF2"/>
-          </a:solidFill>
-          <a:ln w="9525">
-            <a:solidFill>
-              <a:srgbClr val="C5CBD3"/>
-            </a:solidFill>
-          </a:ln>
-          <a:effectLst/>
-        </p:spPr>
-        <p:style>
-          <a:lnRef idx="1">
-            <a:schemeClr val="accent1"/>
-          </a:lnRef>
-          <a:fillRef idx="3">
-            <a:schemeClr val="accent1"/>
-          </a:fillRef>
-          <a:effectRef idx="2">
-            <a:schemeClr val="accent1"/>
-          </a:effectRef>
-          <a:fontRef idx="minor">
-            <a:schemeClr val="lt1"/>
-          </a:fontRef>
-        </p:style>
-        <p:txBody>
-          <a:bodyPr rtlCol="0" anchor="ctr"/>
-          <a:lstStyle/>
-          <a:p/>
-        </p:txBody>
-      </p:sp>
-      <p:sp>
-        <p:nvSpPr>
-          <p:cNvPr id="38" name="TextBox 37"/>
-          <p:cNvSpPr txBox="1"/>
-          <p:nvPr/>
-        </p:nvSpPr>
-        <p:spPr>
-          <a:xfrm>
-            <a:off x="4187952" y="3675887"/>
-            <a:ext cx="4562855" cy="237744"/>
-          </a:xfrm>
-          <a:prstGeom prst="rect">
-            <a:avLst/>
-          </a:prstGeom>
-          <a:noFill/>
-        </p:spPr>
-        <p:txBody>
-          <a:bodyPr wrap="square" lIns="0" rIns="0" tIns="0" bIns="0" anchor="t">
-            <a:spAutoFit/>
-          </a:bodyPr>
-          <a:lstStyle/>
-          <a:p>
-            <a:pPr algn="l"/>
-            <a:r>
-              <a:rPr sz="1200" b="1">
-                <a:solidFill>
-                  <a:srgbClr val="1C2127"/>
-                </a:solidFill>
-                <a:latin typeface="Calibri"/>
-              </a:rPr>
-              <a:t>Generation job</a:t>
-            </a:r>
-            <a:r>
-              <a:rPr sz="950" b="0">
-                <a:solidFill>
-                  <a:srgbClr val="2F343C"/>
-                </a:solidFill>
-                <a:latin typeface="Calibri"/>
-              </a:rPr>
-              <a:t>   Databricks Jobs · serverless · stages 01–04</a:t>
-            </a:r>
-          </a:p>
-        </p:txBody>
-      </p:sp>
-      <p:sp>
-        <p:nvSpPr>
-          <p:cNvPr id="39" name="Rounded Rectangle 38"/>
-          <p:cNvSpPr/>
-          <p:nvPr/>
-        </p:nvSpPr>
-        <p:spPr>
-          <a:xfrm>
-            <a:off x="4187952" y="4005072"/>
-            <a:ext cx="1072134" cy="640080"/>
-          </a:xfrm>
-          <a:prstGeom prst="roundRect">
-            <a:avLst>
-              <a:gd name="adj" fmla="val 8000"/>
-            </a:avLst>
-          </a:prstGeom>
-          <a:solidFill>
-            <a:srgbClr val="F6F7F9"/>
-          </a:solidFill>
-          <a:ln w="9525">
-            <a:solidFill>
-              <a:srgbClr val="C5CBD3"/>
-            </a:solidFill>
-          </a:ln>
-          <a:effectLst/>
-        </p:spPr>
-        <p:style>
-          <a:lnRef idx="1">
-            <a:schemeClr val="accent1"/>
-          </a:lnRef>
-          <a:fillRef idx="3">
-            <a:schemeClr val="accent1"/>
-          </a:fillRef>
-          <a:effectRef idx="2">
-            <a:schemeClr val="accent1"/>
-          </a:effectRef>
-          <a:fontRef idx="minor">
-            <a:schemeClr val="lt1"/>
-          </a:fontRef>
-        </p:style>
-        <p:txBody>
-          <a:bodyPr rtlCol="0" anchor="ctr"/>
-          <a:lstStyle/>
-          <a:p/>
-        </p:txBody>
-      </p:sp>
-      <p:sp>
-        <p:nvSpPr>
-          <p:cNvPr id="40" name="TextBox 39"/>
-          <p:cNvSpPr txBox="1"/>
-          <p:nvPr/>
-        </p:nvSpPr>
-        <p:spPr>
-          <a:xfrm>
-            <a:off x="4279392" y="4069080"/>
-            <a:ext cx="889253" cy="164592"/>
-          </a:xfrm>
-          <a:prstGeom prst="rect">
-            <a:avLst/>
-          </a:prstGeom>
-          <a:noFill/>
-        </p:spPr>
-        <p:txBody>
-          <a:bodyPr wrap="square" lIns="0" rIns="0" tIns="0" bIns="0" anchor="t">
-            <a:spAutoFit/>
-          </a:bodyPr>
-          <a:lstStyle/>
-          <a:p>
-            <a:pPr algn="l"/>
-            <a:r>
-              <a:rPr sz="850" b="1">
-                <a:solidFill>
-                  <a:srgbClr val="007067"/>
-                </a:solidFill>
-                <a:latin typeface="Consolas"/>
-              </a:rPr>
-              <a:t>01</a:t>
-            </a:r>
-          </a:p>
-        </p:txBody>
-      </p:sp>
-      <p:sp>
-        <p:nvSpPr>
-          <p:cNvPr id="41" name="TextBox 40"/>
-          <p:cNvSpPr txBox="1"/>
-          <p:nvPr/>
-        </p:nvSpPr>
-        <p:spPr>
-          <a:xfrm>
-            <a:off x="4279392" y="4233672"/>
-            <a:ext cx="889253" cy="201168"/>
-          </a:xfrm>
-          <a:prstGeom prst="rect">
-            <a:avLst/>
-          </a:prstGeom>
-          <a:noFill/>
-        </p:spPr>
-        <p:txBody>
-          <a:bodyPr wrap="square" lIns="0" rIns="0" tIns="0" bIns="0" anchor="t">
-            <a:spAutoFit/>
-          </a:bodyPr>
-          <a:lstStyle/>
-          <a:p>
-            <a:pPr algn="l"/>
-            <a:r>
-              <a:rPr sz="1000" b="1">
-                <a:solidFill>
-                  <a:srgbClr val="1C2127"/>
-                </a:solidFill>
-                <a:latin typeface="Calibri"/>
-              </a:rPr>
-              <a:t>Ingest</a:t>
-            </a:r>
-          </a:p>
-        </p:txBody>
-      </p:sp>
-      <p:sp>
-        <p:nvSpPr>
-          <p:cNvPr id="42" name="TextBox 41"/>
-          <p:cNvSpPr txBox="1"/>
-          <p:nvPr/>
-        </p:nvSpPr>
-        <p:spPr>
-          <a:xfrm>
-            <a:off x="4279392" y="4434840"/>
-            <a:ext cx="889253" cy="182880"/>
-          </a:xfrm>
-          <a:prstGeom prst="rect">
-            <a:avLst/>
-          </a:prstGeom>
-          <a:noFill/>
-        </p:spPr>
-        <p:txBody>
-          <a:bodyPr wrap="square" lIns="0" rIns="0" tIns="0" bIns="0" anchor="t">
-            <a:spAutoFit/>
-          </a:bodyPr>
-          <a:lstStyle/>
-          <a:p>
-            <a:pPr algn="l"/>
-            <a:r>
-              <a:rPr sz="800" b="0">
-                <a:solidFill>
-                  <a:srgbClr val="2F343C"/>
-                </a:solidFill>
-                <a:latin typeface="Calibri"/>
-              </a:rPr>
-              <a:t>docx → markdown</a:t>
-            </a:r>
-          </a:p>
-        </p:txBody>
-      </p:sp>
       <p:cxnSp>
         <p:nvCxnSpPr>
-          <p:cNvPr id="43" name="Connector 42"/>
+          <p:cNvPr id="73" name="Connector 72"/>
           <p:cNvCxnSpPr/>
           <p:nvPr/>
         </p:nvCxnSpPr>
         <p:spPr>
           <a:xfrm>
-            <a:off x="5269229" y="4334256"/>
+            <a:off x="5010912" y="5129783"/>
             <a:ext cx="73152" cy="0"/>
           </a:xfrm>
           <a:prstGeom prst="line">
             <a:avLst/>
           </a:prstGeom>
-          <a:ln w="9525">
+          <a:ln w="12700">
             <a:solidFill>
-              <a:srgbClr val="5F6B7C"/>
+              <a:srgbClr val="455560"/>
             </a:solidFill>
-            <a:tailEnd type="triangle" w="sm" len="sm"/>
+            <a:tailEnd type="triangle" w="med" len="med"/>
           </a:ln>
         </p:spPr>
         <p:style>
@@ -4679,26 +5759,24 @@
       </p:cxnSp>
       <p:sp>
         <p:nvSpPr>
-          <p:cNvPr id="44" name="Rounded Rectangle 43"/>
+          <p:cNvPr id="74" name="Rectangle 73"/>
           <p:cNvSpPr/>
           <p:nvPr/>
         </p:nvSpPr>
         <p:spPr>
           <a:xfrm>
-            <a:off x="5351526" y="4005072"/>
-            <a:ext cx="1072134" cy="640080"/>
-          </a:xfrm>
-          <a:prstGeom prst="roundRect">
-            <a:avLst>
-              <a:gd name="adj" fmla="val 8000"/>
-            </a:avLst>
+            <a:off x="5088636" y="4846320"/>
+            <a:ext cx="1337310" cy="566928"/>
+          </a:xfrm>
+          <a:prstGeom prst="rect">
+            <a:avLst/>
           </a:prstGeom>
           <a:solidFill>
-            <a:srgbClr val="FBEEE8"/>
+            <a:srgbClr val="F0F0F0"/>
           </a:solidFill>
-          <a:ln w="15875">
+          <a:ln w="12700">
             <a:solidFill>
-              <a:srgbClr val="D97757"/>
+              <a:srgbClr val="CDD2D8"/>
             </a:solidFill>
           </a:ln>
           <a:effectLst/>
@@ -4725,14 +5803,14 @@
       </p:sp>
       <p:sp>
         <p:nvSpPr>
-          <p:cNvPr id="45" name="TextBox 44"/>
+          <p:cNvPr id="75" name="TextBox 74"/>
           <p:cNvSpPr txBox="1"/>
           <p:nvPr/>
         </p:nvSpPr>
         <p:spPr>
           <a:xfrm>
-            <a:off x="5442966" y="4069080"/>
-            <a:ext cx="889253" cy="164592"/>
+            <a:off x="5180075" y="4901183"/>
+            <a:ext cx="1154430" cy="164592"/>
           </a:xfrm>
           <a:prstGeom prst="rect">
             <a:avLst/>
@@ -4749,25 +5827,25 @@
             <a:r>
               <a:rPr sz="850" b="1">
                 <a:solidFill>
-                  <a:srgbClr val="A04D2C"/>
+                  <a:srgbClr val="003DA5"/>
                 </a:solidFill>
                 <a:latin typeface="Consolas"/>
               </a:rPr>
-              <a:t>02</a:t>
-            </a:r>
-          </a:p>
-        </p:txBody>
-      </p:sp>
-      <p:sp>
-        <p:nvSpPr>
-          <p:cNvPr id="46" name="TextBox 45"/>
+              <a:t>03</a:t>
+            </a:r>
+          </a:p>
+        </p:txBody>
+      </p:sp>
+      <p:sp>
+        <p:nvSpPr>
+          <p:cNvPr id="76" name="TextBox 75"/>
           <p:cNvSpPr txBox="1"/>
           <p:nvPr/>
         </p:nvSpPr>
         <p:spPr>
           <a:xfrm>
-            <a:off x="5442966" y="4233672"/>
-            <a:ext cx="889253" cy="201168"/>
+            <a:off x="5180075" y="5056632"/>
+            <a:ext cx="1154430" cy="182880"/>
           </a:xfrm>
           <a:prstGeom prst="rect">
             <a:avLst/>
@@ -4782,27 +5860,27 @@
           <a:p>
             <a:pPr algn="l"/>
             <a:r>
-              <a:rPr sz="1000" b="1">
-                <a:solidFill>
-                  <a:srgbClr val="A04D2C"/>
-                </a:solidFill>
-                <a:latin typeface="Calibri"/>
+              <a:rPr sz="940" b="1">
+                <a:solidFill>
+                  <a:srgbClr val="0A2458"/>
+                </a:solidFill>
+                <a:latin typeface="Segoe UI"/>
               </a:rPr>
-              <a:t>Extract</a:t>
-            </a:r>
-          </a:p>
-        </p:txBody>
-      </p:sp>
-      <p:sp>
-        <p:nvSpPr>
-          <p:cNvPr id="47" name="TextBox 46"/>
+              <a:t>Audit · gate</a:t>
+            </a:r>
+          </a:p>
+        </p:txBody>
+      </p:sp>
+      <p:sp>
+        <p:nvSpPr>
+          <p:cNvPr id="77" name="TextBox 76"/>
           <p:cNvSpPr txBox="1"/>
           <p:nvPr/>
         </p:nvSpPr>
         <p:spPr>
           <a:xfrm>
-            <a:off x="5442966" y="4434840"/>
-            <a:ext cx="889253" cy="182880"/>
+            <a:off x="5180075" y="5239512"/>
+            <a:ext cx="1154430" cy="164592"/>
           </a:xfrm>
           <a:prstGeom prst="rect">
             <a:avLst/>
@@ -4817,36 +5895,36 @@
           <a:p>
             <a:pPr algn="l"/>
             <a:r>
-              <a:rPr sz="800" b="0">
-                <a:solidFill>
-                  <a:srgbClr val="A04D2C"/>
-                </a:solidFill>
-                <a:latin typeface="Calibri"/>
+              <a:rPr sz="740" b="0">
+                <a:solidFill>
+                  <a:srgbClr val="455560"/>
+                </a:solidFill>
+                <a:latin typeface="Segoe UI"/>
               </a:rPr>
-              <a:t>the one model call</a:t>
+              <a:t>verbatim grounding</a:t>
             </a:r>
           </a:p>
         </p:txBody>
       </p:sp>
       <p:cxnSp>
         <p:nvCxnSpPr>
-          <p:cNvPr id="48" name="Connector 47"/>
+          <p:cNvPr id="78" name="Connector 77"/>
           <p:cNvCxnSpPr/>
           <p:nvPr/>
         </p:nvCxnSpPr>
         <p:spPr>
           <a:xfrm>
-            <a:off x="6432804" y="4334256"/>
+            <a:off x="6430518" y="5129783"/>
             <a:ext cx="73152" cy="0"/>
           </a:xfrm>
           <a:prstGeom prst="line">
             <a:avLst/>
           </a:prstGeom>
-          <a:ln w="9525">
+          <a:ln w="12700">
             <a:solidFill>
-              <a:srgbClr val="5F6B7C"/>
+              <a:srgbClr val="455560"/>
             </a:solidFill>
-            <a:tailEnd type="triangle" w="sm" len="sm"/>
+            <a:tailEnd type="triangle" w="med" len="med"/>
           </a:ln>
         </p:spPr>
         <p:style>
@@ -4866,26 +5944,24 @@
       </p:cxnSp>
       <p:sp>
         <p:nvSpPr>
-          <p:cNvPr id="49" name="Rounded Rectangle 48"/>
+          <p:cNvPr id="79" name="Rectangle 78"/>
           <p:cNvSpPr/>
           <p:nvPr/>
         </p:nvSpPr>
         <p:spPr>
           <a:xfrm>
-            <a:off x="6515100" y="4005072"/>
-            <a:ext cx="1072134" cy="640080"/>
-          </a:xfrm>
-          <a:prstGeom prst="roundRect">
-            <a:avLst>
-              <a:gd name="adj" fmla="val 8000"/>
-            </a:avLst>
+            <a:off x="6508242" y="4846320"/>
+            <a:ext cx="1337310" cy="566928"/>
+          </a:xfrm>
+          <a:prstGeom prst="rect">
+            <a:avLst/>
           </a:prstGeom>
           <a:solidFill>
-            <a:srgbClr val="F6F7F9"/>
+            <a:srgbClr val="F0F0F0"/>
           </a:solidFill>
-          <a:ln w="9525">
+          <a:ln w="12700">
             <a:solidFill>
-              <a:srgbClr val="C5CBD3"/>
+              <a:srgbClr val="CDD2D8"/>
             </a:solidFill>
           </a:ln>
           <a:effectLst/>
@@ -4912,14 +5988,14 @@
       </p:sp>
       <p:sp>
         <p:nvSpPr>
-          <p:cNvPr id="50" name="TextBox 49"/>
+          <p:cNvPr id="80" name="TextBox 79"/>
           <p:cNvSpPr txBox="1"/>
           <p:nvPr/>
         </p:nvSpPr>
         <p:spPr>
           <a:xfrm>
-            <a:off x="6606540" y="4069080"/>
-            <a:ext cx="889253" cy="164592"/>
+            <a:off x="6599681" y="4901183"/>
+            <a:ext cx="1154430" cy="164592"/>
           </a:xfrm>
           <a:prstGeom prst="rect">
             <a:avLst/>
@@ -4936,25 +6012,25 @@
             <a:r>
               <a:rPr sz="850" b="1">
                 <a:solidFill>
-                  <a:srgbClr val="007067"/>
+                  <a:srgbClr val="003DA5"/>
                 </a:solidFill>
                 <a:latin typeface="Consolas"/>
               </a:rPr>
-              <a:t>03</a:t>
-            </a:r>
-          </a:p>
-        </p:txBody>
-      </p:sp>
-      <p:sp>
-        <p:nvSpPr>
-          <p:cNvPr id="51" name="TextBox 50"/>
+              <a:t>04</a:t>
+            </a:r>
+          </a:p>
+        </p:txBody>
+      </p:sp>
+      <p:sp>
+        <p:nvSpPr>
+          <p:cNvPr id="81" name="TextBox 80"/>
           <p:cNvSpPr txBox="1"/>
           <p:nvPr/>
         </p:nvSpPr>
         <p:spPr>
           <a:xfrm>
-            <a:off x="6606540" y="4233672"/>
-            <a:ext cx="889253" cy="201168"/>
+            <a:off x="6599681" y="5056632"/>
+            <a:ext cx="1154430" cy="182880"/>
           </a:xfrm>
           <a:prstGeom prst="rect">
             <a:avLst/>
@@ -4969,27 +6045,27 @@
           <a:p>
             <a:pPr algn="l"/>
             <a:r>
-              <a:rPr sz="1000" b="1">
-                <a:solidFill>
-                  <a:srgbClr val="1C2127"/>
-                </a:solidFill>
-                <a:latin typeface="Calibri"/>
+              <a:rPr sz="940" b="1">
+                <a:solidFill>
+                  <a:srgbClr val="0A2458"/>
+                </a:solidFill>
+                <a:latin typeface="Segoe UI"/>
               </a:rPr>
-              <a:t>Audit · gate</a:t>
-            </a:r>
-          </a:p>
-        </p:txBody>
-      </p:sp>
-      <p:sp>
-        <p:nvSpPr>
-          <p:cNvPr id="52" name="TextBox 51"/>
+              <a:t>Render</a:t>
+            </a:r>
+          </a:p>
+        </p:txBody>
+      </p:sp>
+      <p:sp>
+        <p:nvSpPr>
+          <p:cNvPr id="82" name="TextBox 81"/>
           <p:cNvSpPr txBox="1"/>
           <p:nvPr/>
         </p:nvSpPr>
         <p:spPr>
           <a:xfrm>
-            <a:off x="6606540" y="4434840"/>
-            <a:ext cx="889253" cy="182880"/>
+            <a:off x="6599681" y="5239512"/>
+            <a:ext cx="1154430" cy="164592"/>
           </a:xfrm>
           <a:prstGeom prst="rect">
             <a:avLst/>
@@ -5004,75 +6080,37 @@
           <a:p>
             <a:pPr algn="l"/>
             <a:r>
-              <a:rPr sz="800" b="0">
-                <a:solidFill>
-                  <a:srgbClr val="2F343C"/>
-                </a:solidFill>
-                <a:latin typeface="Calibri"/>
+              <a:rPr sz="740" b="0">
+                <a:solidFill>
+                  <a:srgbClr val="455560"/>
+                </a:solidFill>
+                <a:latin typeface="Segoe UI"/>
               </a:rPr>
-              <a:t>verbatim grounding</a:t>
-            </a:r>
-          </a:p>
-        </p:txBody>
-      </p:sp>
-      <p:cxnSp>
-        <p:nvCxnSpPr>
-          <p:cNvPr id="53" name="Connector 52"/>
-          <p:cNvCxnSpPr/>
-          <p:nvPr/>
-        </p:nvCxnSpPr>
-        <p:spPr>
-          <a:xfrm>
-            <a:off x="7596377" y="4334256"/>
-            <a:ext cx="73152" cy="0"/>
-          </a:xfrm>
-          <a:prstGeom prst="line">
-            <a:avLst/>
-          </a:prstGeom>
-          <a:ln w="9525">
+              <a:t>STTM + contract</a:t>
+            </a:r>
+          </a:p>
+        </p:txBody>
+      </p:sp>
+      <p:sp>
+        <p:nvSpPr>
+          <p:cNvPr id="83" name="Rectangle 82"/>
+          <p:cNvSpPr/>
+          <p:nvPr/>
+        </p:nvSpPr>
+        <p:spPr>
+          <a:xfrm>
+            <a:off x="8174736" y="4553712"/>
+            <a:ext cx="3139135" cy="932688"/>
+          </a:xfrm>
+          <a:prstGeom prst="rect">
+            <a:avLst/>
+          </a:prstGeom>
+          <a:solidFill>
+            <a:srgbClr val="FFFFFF"/>
+          </a:solidFill>
+          <a:ln w="12700">
             <a:solidFill>
-              <a:srgbClr val="5F6B7C"/>
-            </a:solidFill>
-            <a:tailEnd type="triangle" w="sm" len="sm"/>
-          </a:ln>
-        </p:spPr>
-        <p:style>
-          <a:lnRef idx="2">
-            <a:schemeClr val="accent1"/>
-          </a:lnRef>
-          <a:fillRef idx="0">
-            <a:schemeClr val="accent1"/>
-          </a:fillRef>
-          <a:effectRef idx="1">
-            <a:schemeClr val="accent1"/>
-          </a:effectRef>
-          <a:fontRef idx="minor">
-            <a:schemeClr val="tx1"/>
-          </a:fontRef>
-        </p:style>
-      </p:cxnSp>
-      <p:sp>
-        <p:nvSpPr>
-          <p:cNvPr id="54" name="Rounded Rectangle 53"/>
-          <p:cNvSpPr/>
-          <p:nvPr/>
-        </p:nvSpPr>
-        <p:spPr>
-          <a:xfrm>
-            <a:off x="7678674" y="4005072"/>
-            <a:ext cx="1072134" cy="640080"/>
-          </a:xfrm>
-          <a:prstGeom prst="roundRect">
-            <a:avLst>
-              <a:gd name="adj" fmla="val 8000"/>
-            </a:avLst>
-          </a:prstGeom>
-          <a:solidFill>
-            <a:srgbClr val="F6F7F9"/>
-          </a:solidFill>
-          <a:ln w="9525">
-            <a:solidFill>
-              <a:srgbClr val="C5CBD3"/>
+              <a:srgbClr val="CDD2D8"/>
             </a:solidFill>
           </a:ln>
           <a:effectLst/>
@@ -5099,14 +6137,14 @@
       </p:sp>
       <p:sp>
         <p:nvSpPr>
-          <p:cNvPr id="55" name="TextBox 54"/>
+          <p:cNvPr id="84" name="TextBox 83"/>
           <p:cNvSpPr txBox="1"/>
           <p:nvPr/>
         </p:nvSpPr>
         <p:spPr>
           <a:xfrm>
-            <a:off x="7770114" y="4069080"/>
-            <a:ext cx="889253" cy="164592"/>
+            <a:off x="8321040" y="4626864"/>
+            <a:ext cx="2846527" cy="182880"/>
           </a:xfrm>
           <a:prstGeom prst="rect">
             <a:avLst/>
@@ -5121,90 +6159,29 @@
           <a:p>
             <a:pPr algn="l"/>
             <a:r>
-              <a:rPr sz="850" b="1">
-                <a:solidFill>
-                  <a:srgbClr val="007067"/>
-                </a:solidFill>
-                <a:latin typeface="Consolas"/>
+              <a:rPr sz="1000" b="1">
+                <a:solidFill>
+                  <a:srgbClr val="0A2458"/>
+                </a:solidFill>
+                <a:latin typeface="Segoe UI"/>
               </a:rPr>
-              <a:t>04</a:t>
-            </a:r>
-          </a:p>
-        </p:txBody>
-      </p:sp>
-      <p:sp>
-        <p:nvSpPr>
-          <p:cNvPr id="56" name="TextBox 55"/>
-          <p:cNvSpPr txBox="1"/>
-          <p:nvPr/>
-        </p:nvSpPr>
-        <p:spPr>
-          <a:xfrm>
-            <a:off x="7770114" y="4233672"/>
-            <a:ext cx="889253" cy="201168"/>
-          </a:xfrm>
-          <a:prstGeom prst="rect">
-            <a:avLst/>
-          </a:prstGeom>
-          <a:noFill/>
-        </p:spPr>
-        <p:txBody>
-          <a:bodyPr wrap="square" lIns="0" rIns="0" tIns="0" bIns="0" anchor="t">
-            <a:spAutoFit/>
-          </a:bodyPr>
-          <a:lstStyle/>
-          <a:p>
-            <a:pPr algn="l"/>
-            <a:r>
-              <a:rPr sz="1000" b="1">
-                <a:solidFill>
-                  <a:srgbClr val="1C2127"/>
-                </a:solidFill>
-                <a:latin typeface="Calibri"/>
+              <a:t>Review app</a:t>
+            </a:r>
+            <a:r>
+              <a:rPr sz="840" b="0">
+                <a:solidFill>
+                  <a:srgbClr val="333F48"/>
+                </a:solidFill>
+                <a:latin typeface="Segoe UI"/>
               </a:rPr>
-              <a:t>Render</a:t>
-            </a:r>
-          </a:p>
-        </p:txBody>
-      </p:sp>
-      <p:sp>
-        <p:nvSpPr>
-          <p:cNvPr id="57" name="TextBox 56"/>
-          <p:cNvSpPr txBox="1"/>
-          <p:nvPr/>
-        </p:nvSpPr>
-        <p:spPr>
-          <a:xfrm>
-            <a:off x="7770114" y="4434840"/>
-            <a:ext cx="889253" cy="182880"/>
-          </a:xfrm>
-          <a:prstGeom prst="rect">
-            <a:avLst/>
-          </a:prstGeom>
-          <a:noFill/>
-        </p:spPr>
-        <p:txBody>
-          <a:bodyPr wrap="square" lIns="0" rIns="0" tIns="0" bIns="0" anchor="t">
-            <a:spAutoFit/>
-          </a:bodyPr>
-          <a:lstStyle/>
-          <a:p>
-            <a:pPr algn="l"/>
-            <a:r>
-              <a:rPr sz="800" b="0">
-                <a:solidFill>
-                  <a:srgbClr val="2F343C"/>
-                </a:solidFill>
-                <a:latin typeface="Calibri"/>
-              </a:rPr>
-              <a:t>STTM + contract</a:t>
+              <a:t>   Databricks Apps</a:t>
             </a:r>
           </a:p>
         </p:txBody>
       </p:sp>
       <p:pic>
         <p:nvPicPr>
-          <p:cNvPr id="58" name="Picture 57" descr="claude.png"/>
+          <p:cNvPr id="85" name="Picture 84" descr="fastapi.png"/>
           <p:cNvPicPr>
             <a:picLocks noChangeAspect="1"/>
           </p:cNvPicPr>
@@ -5218,142 +6195,17 @@
         </p:blipFill>
         <p:spPr>
           <a:xfrm>
-            <a:off x="4187952" y="4755451"/>
-            <a:ext cx="914400" cy="200025"/>
+            <a:off x="8321040" y="4894373"/>
+            <a:ext cx="603504" cy="114204"/>
           </a:xfrm>
           <a:prstGeom prst="rect">
             <a:avLst/>
           </a:prstGeom>
         </p:spPr>
       </p:pic>
-      <p:sp>
-        <p:nvSpPr>
-          <p:cNvPr id="59" name="TextBox 58"/>
-          <p:cNvSpPr txBox="1"/>
-          <p:nvPr/>
-        </p:nvSpPr>
-        <p:spPr>
-          <a:xfrm>
-            <a:off x="5138928" y="4736592"/>
-            <a:ext cx="3611879" cy="237744"/>
-          </a:xfrm>
-          <a:prstGeom prst="rect">
-            <a:avLst/>
-          </a:prstGeom>
-          <a:noFill/>
-        </p:spPr>
-        <p:txBody>
-          <a:bodyPr wrap="square" lIns="0" rIns="0" tIns="0" bIns="0" anchor="t">
-            <a:spAutoFit/>
-          </a:bodyPr>
-          <a:lstStyle/>
-          <a:p>
-            <a:pPr algn="l"/>
-            <a:r>
-              <a:rPr sz="850" b="0">
-                <a:solidFill>
-                  <a:srgbClr val="2F343C"/>
-                </a:solidFill>
-                <a:latin typeface="Calibri"/>
-              </a:rPr>
-              <a:t>Anthropic API — one call per document, in stage 02; everything else is deterministic code.</a:t>
-            </a:r>
-          </a:p>
-        </p:txBody>
-      </p:sp>
-      <p:sp>
-        <p:nvSpPr>
-          <p:cNvPr id="60" name="Rounded Rectangle 59"/>
-          <p:cNvSpPr/>
-          <p:nvPr/>
-        </p:nvSpPr>
-        <p:spPr>
-          <a:xfrm>
-            <a:off x="9098280" y="3566160"/>
-            <a:ext cx="2316175" cy="1463040"/>
-          </a:xfrm>
-          <a:prstGeom prst="roundRect">
-            <a:avLst>
-              <a:gd name="adj" fmla="val 4000"/>
-            </a:avLst>
-          </a:prstGeom>
-          <a:solidFill>
-            <a:srgbClr val="EDEFF2"/>
-          </a:solidFill>
-          <a:ln w="9525">
-            <a:solidFill>
-              <a:srgbClr val="C5CBD3"/>
-            </a:solidFill>
-          </a:ln>
-          <a:effectLst/>
-        </p:spPr>
-        <p:style>
-          <a:lnRef idx="1">
-            <a:schemeClr val="accent1"/>
-          </a:lnRef>
-          <a:fillRef idx="3">
-            <a:schemeClr val="accent1"/>
-          </a:fillRef>
-          <a:effectRef idx="2">
-            <a:schemeClr val="accent1"/>
-          </a:effectRef>
-          <a:fontRef idx="minor">
-            <a:schemeClr val="lt1"/>
-          </a:fontRef>
-        </p:style>
-        <p:txBody>
-          <a:bodyPr rtlCol="0" anchor="ctr"/>
-          <a:lstStyle/>
-          <a:p/>
-        </p:txBody>
-      </p:sp>
-      <p:sp>
-        <p:nvSpPr>
-          <p:cNvPr id="61" name="TextBox 60"/>
-          <p:cNvSpPr txBox="1"/>
-          <p:nvPr/>
-        </p:nvSpPr>
-        <p:spPr>
-          <a:xfrm>
-            <a:off x="9262872" y="3675887"/>
-            <a:ext cx="1986991" cy="237744"/>
-          </a:xfrm>
-          <a:prstGeom prst="rect">
-            <a:avLst/>
-          </a:prstGeom>
-          <a:noFill/>
-        </p:spPr>
-        <p:txBody>
-          <a:bodyPr wrap="square" lIns="0" rIns="0" tIns="0" bIns="0" anchor="t">
-            <a:spAutoFit/>
-          </a:bodyPr>
-          <a:lstStyle/>
-          <a:p>
-            <a:pPr algn="l"/>
-            <a:r>
-              <a:rPr sz="1200" b="1">
-                <a:solidFill>
-                  <a:srgbClr val="1C2127"/>
-                </a:solidFill>
-                <a:latin typeface="Calibri"/>
-              </a:rPr>
-              <a:t>Review app</a:t>
-            </a:r>
-            <a:r>
-              <a:rPr sz="950" b="0">
-                <a:solidFill>
-                  <a:srgbClr val="2F343C"/>
-                </a:solidFill>
-                <a:latin typeface="Calibri"/>
-              </a:rPr>
-              <a:t>   Databricks Apps</a:t>
-            </a:r>
-          </a:p>
-        </p:txBody>
-      </p:sp>
       <p:pic>
         <p:nvPicPr>
-          <p:cNvPr id="62" name="Picture 61" descr="fastapi.png"/>
+          <p:cNvPr id="86" name="Picture 85" descr="react.png"/>
           <p:cNvPicPr>
             <a:picLocks noChangeAspect="1"/>
           </p:cNvPicPr>
@@ -5367,17 +6219,372 @@
         </p:blipFill>
         <p:spPr>
           <a:xfrm>
-            <a:off x="9262872" y="4027543"/>
-            <a:ext cx="777240" cy="147081"/>
+            <a:off x="9015984" y="4856162"/>
+            <a:ext cx="182880" cy="163195"/>
           </a:xfrm>
           <a:prstGeom prst="rect">
             <a:avLst/>
           </a:prstGeom>
         </p:spPr>
       </p:pic>
+      <p:sp>
+        <p:nvSpPr>
+          <p:cNvPr id="87" name="TextBox 86"/>
+          <p:cNvSpPr txBox="1"/>
+          <p:nvPr/>
+        </p:nvSpPr>
+        <p:spPr>
+          <a:xfrm>
+            <a:off x="8321040" y="5102352"/>
+            <a:ext cx="2846527" cy="365760"/>
+          </a:xfrm>
+          <a:prstGeom prst="rect">
+            <a:avLst/>
+          </a:prstGeom>
+          <a:noFill/>
+        </p:spPr>
+        <p:txBody>
+          <a:bodyPr wrap="square" lIns="0" rIns="0" tIns="0" bIns="0" anchor="t">
+            <a:spAutoFit/>
+          </a:bodyPr>
+          <a:lstStyle/>
+          <a:p>
+            <a:pPr algn="l">
+              <a:lnSpc>
+                <a:spcPct val="110000"/>
+              </a:lnSpc>
+            </a:pPr>
+            <a:r>
+              <a:rPr sz="819" b="0">
+                <a:solidFill>
+                  <a:srgbClr val="333F48"/>
+                </a:solidFill>
+                <a:latin typeface="Segoe UI"/>
+              </a:rPr>
+              <a:t>Pick an FRD · run (confirm-gated, billed) · resolve what the agent gated · re-render · download.</a:t>
+            </a:r>
+          </a:p>
+        </p:txBody>
+      </p:sp>
+      <p:sp>
+        <p:nvSpPr>
+          <p:cNvPr id="88" name="Rectangle 87"/>
+          <p:cNvSpPr/>
+          <p:nvPr/>
+        </p:nvSpPr>
+        <p:spPr>
+          <a:xfrm>
+            <a:off x="859536" y="5522976"/>
+            <a:ext cx="10454335" cy="365760"/>
+          </a:xfrm>
+          <a:prstGeom prst="rect">
+            <a:avLst/>
+          </a:prstGeom>
+          <a:solidFill>
+            <a:srgbClr val="FFFFFF"/>
+          </a:solidFill>
+          <a:ln w="12700">
+            <a:solidFill>
+              <a:srgbClr val="CDD2D8"/>
+            </a:solidFill>
+          </a:ln>
+          <a:effectLst/>
+        </p:spPr>
+        <p:style>
+          <a:lnRef idx="1">
+            <a:schemeClr val="accent1"/>
+          </a:lnRef>
+          <a:fillRef idx="3">
+            <a:schemeClr val="accent1"/>
+          </a:fillRef>
+          <a:effectRef idx="2">
+            <a:schemeClr val="accent1"/>
+          </a:effectRef>
+          <a:fontRef idx="minor">
+            <a:schemeClr val="lt1"/>
+          </a:fontRef>
+        </p:style>
+        <p:txBody>
+          <a:bodyPr rtlCol="0" anchor="ctr"/>
+          <a:lstStyle/>
+          <a:p/>
+        </p:txBody>
+      </p:sp>
+      <p:sp>
+        <p:nvSpPr>
+          <p:cNvPr id="89" name="Rectangle 88"/>
+          <p:cNvSpPr/>
+          <p:nvPr/>
+        </p:nvSpPr>
+        <p:spPr>
+          <a:xfrm>
+            <a:off x="859536" y="5522976"/>
+            <a:ext cx="45720" cy="365760"/>
+          </a:xfrm>
+          <a:prstGeom prst="rect">
+            <a:avLst/>
+          </a:prstGeom>
+          <a:solidFill>
+            <a:srgbClr val="0A2458"/>
+          </a:solidFill>
+          <a:ln>
+            <a:noFill/>
+          </a:ln>
+          <a:effectLst/>
+        </p:spPr>
+        <p:style>
+          <a:lnRef idx="1">
+            <a:schemeClr val="accent1"/>
+          </a:lnRef>
+          <a:fillRef idx="3">
+            <a:schemeClr val="accent1"/>
+          </a:fillRef>
+          <a:effectRef idx="2">
+            <a:schemeClr val="accent1"/>
+          </a:effectRef>
+          <a:fontRef idx="minor">
+            <a:schemeClr val="lt1"/>
+          </a:fontRef>
+        </p:style>
+        <p:txBody>
+          <a:bodyPr rtlCol="0" anchor="ctr"/>
+          <a:lstStyle/>
+          <a:p/>
+        </p:txBody>
+      </p:sp>
+      <p:sp>
+        <p:nvSpPr>
+          <p:cNvPr id="90" name="TextBox 89"/>
+          <p:cNvSpPr txBox="1"/>
+          <p:nvPr/>
+        </p:nvSpPr>
+        <p:spPr>
+          <a:xfrm>
+            <a:off x="1060704" y="5623560"/>
+            <a:ext cx="2286000" cy="201168"/>
+          </a:xfrm>
+          <a:prstGeom prst="rect">
+            <a:avLst/>
+          </a:prstGeom>
+          <a:noFill/>
+        </p:spPr>
+        <p:txBody>
+          <a:bodyPr wrap="square" lIns="0" rIns="0" tIns="0" bIns="0" anchor="t">
+            <a:spAutoFit/>
+          </a:bodyPr>
+          <a:lstStyle/>
+          <a:p>
+            <a:pPr algn="l"/>
+            <a:r>
+              <a:rPr sz="780" b="1" spc="120">
+                <a:solidFill>
+                  <a:srgbClr val="0A2458"/>
+                </a:solidFill>
+                <a:latin typeface="Segoe UI"/>
+              </a:rPr>
+              <a:t>BUILT INTO THE AGENT</a:t>
+            </a:r>
+          </a:p>
+        </p:txBody>
+      </p:sp>
+      <p:sp>
+        <p:nvSpPr>
+          <p:cNvPr id="91" name="TextBox 90"/>
+          <p:cNvSpPr txBox="1"/>
+          <p:nvPr/>
+        </p:nvSpPr>
+        <p:spPr>
+          <a:xfrm>
+            <a:off x="2871215" y="5614416"/>
+            <a:ext cx="8387791" cy="219456"/>
+          </a:xfrm>
+          <a:prstGeom prst="rect">
+            <a:avLst/>
+          </a:prstGeom>
+          <a:noFill/>
+        </p:spPr>
+        <p:txBody>
+          <a:bodyPr wrap="square" lIns="0" rIns="0" tIns="0" bIns="0" anchor="t">
+            <a:spAutoFit/>
+          </a:bodyPr>
+          <a:lstStyle/>
+          <a:p>
+            <a:pPr algn="l"/>
+            <a:r>
+              <a:rPr sz="819" b="1">
+                <a:solidFill>
+                  <a:srgbClr val="0A2458"/>
+                </a:solidFill>
+                <a:latin typeface="Segoe UI"/>
+              </a:rPr>
+              <a:t>Naming + engineering standards</a:t>
+            </a:r>
+            <a:r>
+              <a:rPr sz="819" b="0">
+                <a:solidFill>
+                  <a:srgbClr val="333F48"/>
+                </a:solidFill>
+                <a:latin typeface="Segoe UI"/>
+              </a:rPr>
+              <a:t> — versioned contracts, hashed into every run as </a:t>
+            </a:r>
+            <a:r>
+              <a:rPr sz="819" b="0">
+                <a:solidFill>
+                  <a:srgbClr val="003DA5"/>
+                </a:solidFill>
+                <a:latin typeface="Consolas"/>
+              </a:rPr>
+              <a:t>standards_sha256</a:t>
+            </a:r>
+            <a:r>
+              <a:rPr sz="819" b="0">
+                <a:solidFill>
+                  <a:srgbClr val="CDD2D8"/>
+                </a:solidFill>
+                <a:latin typeface="Segoe UI"/>
+              </a:rPr>
+              <a:t>      ·      </a:t>
+            </a:r>
+            <a:r>
+              <a:rPr sz="819" b="1">
+                <a:solidFill>
+                  <a:srgbClr val="0A2458"/>
+                </a:solidFill>
+                <a:latin typeface="Segoe UI"/>
+              </a:rPr>
+              <a:t>Approved-STTM corpus</a:t>
+            </a:r>
+            <a:r>
+              <a:rPr sz="819" b="0">
+                <a:solidFill>
+                  <a:srgbClr val="333F48"/>
+                </a:solidFill>
+                <a:latin typeface="Segoe UI"/>
+              </a:rPr>
+              <a:t> — layout template + golden eval</a:t>
+            </a:r>
+          </a:p>
+        </p:txBody>
+      </p:sp>
+      <p:cxnSp>
+        <p:nvCxnSpPr>
+          <p:cNvPr id="92" name="Connector 91"/>
+          <p:cNvCxnSpPr/>
+          <p:nvPr/>
+        </p:nvCxnSpPr>
+        <p:spPr>
+          <a:xfrm>
+            <a:off x="1938528" y="5925312"/>
+            <a:ext cx="0" cy="146304"/>
+          </a:xfrm>
+          <a:prstGeom prst="line">
+            <a:avLst/>
+          </a:prstGeom>
+          <a:ln w="22225">
+            <a:solidFill>
+              <a:srgbClr val="0A2458"/>
+            </a:solidFill>
+            <a:tailEnd type="triangle" w="med" len="med"/>
+          </a:ln>
+        </p:spPr>
+        <p:style>
+          <a:lnRef idx="2">
+            <a:schemeClr val="accent1"/>
+          </a:lnRef>
+          <a:fillRef idx="0">
+            <a:schemeClr val="accent1"/>
+          </a:fillRef>
+          <a:effectRef idx="1">
+            <a:schemeClr val="accent1"/>
+          </a:effectRef>
+          <a:fontRef idx="minor">
+            <a:schemeClr val="tx1"/>
+          </a:fontRef>
+        </p:style>
+      </p:cxnSp>
+      <p:sp>
+        <p:nvSpPr>
+          <p:cNvPr id="93" name="TextBox 92"/>
+          <p:cNvSpPr txBox="1"/>
+          <p:nvPr/>
+        </p:nvSpPr>
+        <p:spPr>
+          <a:xfrm>
+            <a:off x="2121408" y="5897879"/>
+            <a:ext cx="9046159" cy="219456"/>
+          </a:xfrm>
+          <a:prstGeom prst="rect">
+            <a:avLst/>
+          </a:prstGeom>
+          <a:noFill/>
+        </p:spPr>
+        <p:txBody>
+          <a:bodyPr wrap="square" lIns="0" rIns="0" tIns="0" bIns="0" anchor="t">
+            <a:spAutoFit/>
+          </a:bodyPr>
+          <a:lstStyle/>
+          <a:p>
+            <a:pPr algn="l"/>
+            <a:r>
+              <a:rPr sz="950" b="1">
+                <a:solidFill>
+                  <a:srgbClr val="333F48"/>
+                </a:solidFill>
+                <a:latin typeface="Segoe UI"/>
+              </a:rPr>
+              <a:t>draft STTM .xlsx  +  feed contract .json   →   to a named person</a:t>
+            </a:r>
+          </a:p>
+        </p:txBody>
+      </p:sp>
+      <p:sp>
+        <p:nvSpPr>
+          <p:cNvPr id="94" name="Rectangle 93"/>
+          <p:cNvSpPr/>
+          <p:nvPr/>
+        </p:nvSpPr>
+        <p:spPr>
+          <a:xfrm>
+            <a:off x="658368" y="6071616"/>
+            <a:ext cx="5394960" cy="493776"/>
+          </a:xfrm>
+          <a:prstGeom prst="rect">
+            <a:avLst/>
+          </a:prstGeom>
+          <a:solidFill>
+            <a:srgbClr val="FFFFFF"/>
+          </a:solidFill>
+          <a:ln w="12700">
+            <a:solidFill>
+              <a:srgbClr val="003DA5"/>
+            </a:solidFill>
+          </a:ln>
+          <a:effectLst/>
+        </p:spPr>
+        <p:style>
+          <a:lnRef idx="1">
+            <a:schemeClr val="accent1"/>
+          </a:lnRef>
+          <a:fillRef idx="3">
+            <a:schemeClr val="accent1"/>
+          </a:fillRef>
+          <a:effectRef idx="2">
+            <a:schemeClr val="accent1"/>
+          </a:effectRef>
+          <a:fontRef idx="minor">
+            <a:schemeClr val="lt1"/>
+          </a:fontRef>
+        </p:style>
+        <p:txBody>
+          <a:bodyPr rtlCol="0" anchor="ctr"/>
+          <a:lstStyle/>
+          <a:p/>
+        </p:txBody>
+      </p:sp>
       <p:pic>
         <p:nvPicPr>
-          <p:cNvPr id="63" name="Picture 62" descr="react.png"/>
+          <p:cNvPr id="95" name="Picture 94" descr="user.png"/>
           <p:cNvPicPr>
             <a:picLocks noChangeAspect="1"/>
           </p:cNvPicPr>
@@ -5391,8 +6598,8 @@
         </p:blipFill>
         <p:spPr>
           <a:xfrm>
-            <a:off x="10122408" y="3982275"/>
-            <a:ext cx="256032" cy="228473"/>
+            <a:off x="804672" y="6199631"/>
+            <a:ext cx="256032" cy="256032"/>
           </a:xfrm>
           <a:prstGeom prst="rect">
             <a:avLst/>
@@ -5401,14 +6608,14 @@
       </p:pic>
       <p:sp>
         <p:nvSpPr>
-          <p:cNvPr id="64" name="TextBox 63"/>
+          <p:cNvPr id="96" name="TextBox 95"/>
           <p:cNvSpPr txBox="1"/>
           <p:nvPr/>
         </p:nvSpPr>
         <p:spPr>
           <a:xfrm>
-            <a:off x="9262872" y="4297680"/>
-            <a:ext cx="1986991" cy="640080"/>
+            <a:off x="1152144" y="6144768"/>
+            <a:ext cx="4754880" cy="402336"/>
           </a:xfrm>
           <a:prstGeom prst="rect">
             <a:avLst/>
@@ -5423,114 +6630,57 @@
           <a:p>
             <a:pPr algn="l">
               <a:lnSpc>
-                <a:spcPct val="108000"/>
+                <a:spcPct val="110000"/>
               </a:lnSpc>
             </a:pPr>
             <a:r>
-              <a:rPr sz="950" b="0">
-                <a:solidFill>
-                  <a:srgbClr val="2F343C"/>
-                </a:solidFill>
-                <a:latin typeface="Calibri"/>
+              <a:rPr sz="819" b="1">
+                <a:solidFill>
+                  <a:srgbClr val="0A2458"/>
+                </a:solidFill>
+                <a:latin typeface="Segoe UI"/>
               </a:rPr>
-              <a:t>On start-up: syncs SharePoint → Unity Catalog. Then pick an FRD · run (confirm-gated) · answer what the agent could not settle · re-render · download.</a:t>
-            </a:r>
-          </a:p>
-        </p:txBody>
-      </p:sp>
-      <p:cxnSp>
-        <p:nvCxnSpPr>
-          <p:cNvPr id="65" name="Connector 64"/>
-          <p:cNvCxnSpPr/>
-          <p:nvPr/>
-        </p:nvCxnSpPr>
-        <p:spPr>
-          <a:xfrm>
-            <a:off x="4389120" y="5184648"/>
-            <a:ext cx="0" cy="356616"/>
-          </a:xfrm>
-          <a:prstGeom prst="line">
-            <a:avLst/>
-          </a:prstGeom>
-          <a:ln w="19050">
-            <a:solidFill>
-              <a:srgbClr val="2F343C"/>
-            </a:solidFill>
-            <a:tailEnd type="triangle" w="sm" len="sm"/>
-          </a:ln>
-        </p:spPr>
-        <p:style>
-          <a:lnRef idx="2">
-            <a:schemeClr val="accent1"/>
-          </a:lnRef>
-          <a:fillRef idx="0">
-            <a:schemeClr val="accent1"/>
-          </a:fillRef>
-          <a:effectRef idx="1">
-            <a:schemeClr val="accent1"/>
-          </a:effectRef>
-          <a:fontRef idx="minor">
-            <a:schemeClr val="tx1"/>
-          </a:fontRef>
-        </p:style>
-      </p:cxnSp>
-      <p:sp>
-        <p:nvSpPr>
-          <p:cNvPr id="66" name="TextBox 65"/>
-          <p:cNvSpPr txBox="1"/>
-          <p:nvPr/>
-        </p:nvSpPr>
-        <p:spPr>
-          <a:xfrm>
-            <a:off x="4517136" y="5262372"/>
-            <a:ext cx="7132320" cy="201168"/>
-          </a:xfrm>
-          <a:prstGeom prst="rect">
-            <a:avLst/>
-          </a:prstGeom>
-          <a:noFill/>
-        </p:spPr>
-        <p:txBody>
-          <a:bodyPr wrap="square" lIns="0" rIns="0" tIns="0" bIns="0" anchor="t">
-            <a:spAutoFit/>
-          </a:bodyPr>
-          <a:lstStyle/>
-          <a:p>
-            <a:pPr algn="l"/>
-            <a:r>
-              <a:rPr sz="950" b="1">
-                <a:solidFill>
-                  <a:srgbClr val="2F343C"/>
-                </a:solidFill>
-                <a:latin typeface="Calibri"/>
+              <a:t>A person decides.</a:t>
+            </a:r>
+          </a:p>
+          <a:p>
+            <a:pPr algn="l">
+              <a:lnSpc>
+                <a:spcPct val="110000"/>
+              </a:lnSpc>
+            </a:pPr>
+            <a:r>
+              <a:rPr sz="819" b="0">
+                <a:solidFill>
+                  <a:srgbClr val="333F48"/>
+                </a:solidFill>
+                <a:latin typeface="Segoe UI"/>
               </a:rPr>
-              <a:t>draft STTM  .xlsx  +  feed contract  .json   →   to a person</a:t>
-            </a:r>
-          </a:p>
-        </p:txBody>
-      </p:sp>
-      <p:sp>
-        <p:nvSpPr>
-          <p:cNvPr id="67" name="Rounded Rectangle 66"/>
+              <a:t>The reviewer resolves every gated item, approves, and returns the workbook — the next sync pairs it.</a:t>
+            </a:r>
+          </a:p>
+        </p:txBody>
+      </p:sp>
+      <p:sp>
+        <p:nvSpPr>
+          <p:cNvPr id="97" name="Rectangle 96"/>
           <p:cNvSpPr/>
           <p:nvPr/>
         </p:nvSpPr>
         <p:spPr>
           <a:xfrm>
-            <a:off x="548640" y="5541264"/>
-            <a:ext cx="5212080" cy="841248"/>
-          </a:xfrm>
-          <a:prstGeom prst="roundRect">
-            <a:avLst>
-              <a:gd name="adj" fmla="val 2500"/>
-            </a:avLst>
+            <a:off x="6254496" y="6071616"/>
+            <a:ext cx="5278831" cy="493776"/>
+          </a:xfrm>
+          <a:prstGeom prst="rect">
+            <a:avLst/>
           </a:prstGeom>
           <a:solidFill>
-            <a:srgbClr val="F6F7F9"/>
+            <a:srgbClr val="FFFFFF"/>
           </a:solidFill>
           <a:ln w="12700">
             <a:solidFill>
-              <a:srgbClr val="D1980B"/>
+              <a:srgbClr val="0A2458"/>
             </a:solidFill>
           </a:ln>
           <a:effectLst/>
@@ -5555,16 +6705,40 @@
           <a:p/>
         </p:txBody>
       </p:sp>
-      <p:sp>
-        <p:nvSpPr>
-          <p:cNvPr id="68" name="TextBox 67"/>
+      <p:pic>
+        <p:nvPicPr>
+          <p:cNvPr id="98" name="Picture 97" descr="excel.png"/>
+          <p:cNvPicPr>
+            <a:picLocks noChangeAspect="1"/>
+          </p:cNvPicPr>
+          <p:nvPr/>
+        </p:nvPicPr>
+        <p:blipFill>
+          <a:blip r:embed="rId4"/>
+          <a:stretch>
+            <a:fillRect/>
+          </a:stretch>
+        </p:blipFill>
+        <p:spPr>
+          <a:xfrm>
+            <a:off x="6373368" y="6217031"/>
+            <a:ext cx="237744" cy="221234"/>
+          </a:xfrm>
+          <a:prstGeom prst="rect">
+            <a:avLst/>
+          </a:prstGeom>
+        </p:spPr>
+      </p:pic>
+      <p:sp>
+        <p:nvSpPr>
+          <p:cNvPr id="99" name="TextBox 98"/>
           <p:cNvSpPr txBox="1"/>
           <p:nvPr/>
         </p:nvSpPr>
         <p:spPr>
           <a:xfrm>
-            <a:off x="777240" y="5632703"/>
-            <a:ext cx="3657600" cy="201168"/>
+            <a:off x="6675120" y="6163055"/>
+            <a:ext cx="1353312" cy="365760"/>
           </a:xfrm>
           <a:prstGeom prst="rect">
             <a:avLst/>
@@ -5577,22 +6751,42 @@
           </a:bodyPr>
           <a:lstStyle/>
           <a:p>
-            <a:pPr algn="l"/>
-            <a:r>
-              <a:rPr sz="900" b="1" spc="140">
-                <a:solidFill>
-                  <a:srgbClr val="866103"/>
-                </a:solidFill>
-                <a:latin typeface="Calibri"/>
+            <a:pPr algn="l">
+              <a:lnSpc>
+                <a:spcPct val="105000"/>
+              </a:lnSpc>
+            </a:pPr>
+            <a:r>
+              <a:rPr sz="819" b="1">
+                <a:solidFill>
+                  <a:srgbClr val="0A2458"/>
+                </a:solidFill>
+                <a:latin typeface="Segoe UI"/>
               </a:rPr>
-              <a:t>HUMAN REVIEW</a:t>
+              <a:t>STTM workbook</a:t>
+            </a:r>
+          </a:p>
+          <a:p>
+            <a:pPr algn="l">
+              <a:lnSpc>
+                <a:spcPct val="105000"/>
+              </a:lnSpc>
+            </a:pPr>
+            <a:r>
+              <a:rPr sz="819" b="0">
+                <a:solidFill>
+                  <a:srgbClr val="333F48"/>
+                </a:solidFill>
+                <a:latin typeface="Segoe UI"/>
+              </a:rPr>
+              <a:t>.xlsx · client dialect</a:t>
             </a:r>
           </a:p>
         </p:txBody>
       </p:sp>
       <p:pic>
         <p:nvPicPr>
-          <p:cNvPr id="69" name="Picture 68" descr="user.png"/>
+          <p:cNvPr id="100" name="Picture 99" descr="json.png"/>
           <p:cNvPicPr>
             <a:picLocks noChangeAspect="1"/>
           </p:cNvPicPr>
@@ -5606,8 +6800,8 @@
         </p:blipFill>
         <p:spPr>
           <a:xfrm>
-            <a:off x="777240" y="5907024"/>
-            <a:ext cx="384048" cy="384048"/>
+            <a:off x="8065008" y="6208776"/>
+            <a:ext cx="219456" cy="219456"/>
           </a:xfrm>
           <a:prstGeom prst="rect">
             <a:avLst/>
@@ -5616,14 +6810,14 @@
       </p:pic>
       <p:sp>
         <p:nvSpPr>
-          <p:cNvPr id="70" name="TextBox 69"/>
+          <p:cNvPr id="101" name="TextBox 100"/>
           <p:cNvSpPr txBox="1"/>
           <p:nvPr/>
         </p:nvSpPr>
         <p:spPr>
           <a:xfrm>
-            <a:off x="1325880" y="5870448"/>
-            <a:ext cx="4251960" cy="502920"/>
+            <a:off x="8357616" y="6163055"/>
+            <a:ext cx="1280160" cy="365760"/>
           </a:xfrm>
           <a:prstGeom prst="rect">
             <a:avLst/>
@@ -5642,275 +6836,52 @@
               </a:lnSpc>
             </a:pPr>
             <a:r>
-              <a:rPr sz="1000" b="0">
-                <a:solidFill>
-                  <a:srgbClr val="2F343C"/>
-                </a:solidFill>
-                <a:latin typeface="Calibri"/>
+              <a:rPr sz="819" b="1">
+                <a:solidFill>
+                  <a:srgbClr val="0A2458"/>
+                </a:solidFill>
+                <a:latin typeface="Segoe UI"/>
               </a:rPr>
-              <a:t>The reviewer approves the STTM (edits in Excel if needed) and uploads it to SharePoint themselves. The next start-up sync pairs it — it becomes a template.</a:t>
-            </a:r>
-          </a:p>
-        </p:txBody>
-      </p:sp>
-      <p:sp>
-        <p:nvSpPr>
-          <p:cNvPr id="71" name="Rounded Rectangle 70"/>
-          <p:cNvSpPr/>
-          <p:nvPr/>
-        </p:nvSpPr>
-        <p:spPr>
-          <a:xfrm>
-            <a:off x="5989320" y="5541264"/>
-            <a:ext cx="5653735" cy="841248"/>
-          </a:xfrm>
-          <a:prstGeom prst="roundRect">
-            <a:avLst>
-              <a:gd name="adj" fmla="val 2500"/>
-            </a:avLst>
-          </a:prstGeom>
-          <a:solidFill>
-            <a:srgbClr val="F6F7F9"/>
-          </a:solidFill>
-          <a:ln w="12700">
-            <a:solidFill>
-              <a:srgbClr val="7961DB"/>
-            </a:solidFill>
-          </a:ln>
-          <a:effectLst/>
-        </p:spPr>
-        <p:style>
-          <a:lnRef idx="1">
-            <a:schemeClr val="accent1"/>
-          </a:lnRef>
-          <a:fillRef idx="3">
-            <a:schemeClr val="accent1"/>
-          </a:fillRef>
-          <a:effectRef idx="2">
-            <a:schemeClr val="accent1"/>
-          </a:effectRef>
-          <a:fontRef idx="minor">
-            <a:schemeClr val="lt1"/>
-          </a:fontRef>
-        </p:style>
-        <p:txBody>
-          <a:bodyPr rtlCol="0" anchor="ctr"/>
-          <a:lstStyle/>
-          <a:p/>
-        </p:txBody>
-      </p:sp>
-      <p:sp>
-        <p:nvSpPr>
-          <p:cNvPr id="72" name="TextBox 71"/>
-          <p:cNvSpPr txBox="1"/>
-          <p:nvPr/>
-        </p:nvSpPr>
-        <p:spPr>
-          <a:xfrm>
-            <a:off x="6217920" y="5632703"/>
-            <a:ext cx="3657600" cy="201168"/>
-          </a:xfrm>
-          <a:prstGeom prst="rect">
-            <a:avLst/>
-          </a:prstGeom>
-          <a:noFill/>
-        </p:spPr>
-        <p:txBody>
-          <a:bodyPr wrap="square" lIns="0" rIns="0" tIns="0" bIns="0" anchor="t">
-            <a:spAutoFit/>
-          </a:bodyPr>
-          <a:lstStyle/>
-          <a:p>
-            <a:pPr algn="l"/>
-            <a:r>
-              <a:rPr sz="900" b="1" spc="140">
-                <a:solidFill>
-                  <a:srgbClr val="5642A6"/>
-                </a:solidFill>
-                <a:latin typeface="Calibri"/>
-              </a:rPr>
-              <a:t>OUTPUTS · DOWNSTREAM</a:t>
-            </a:r>
-          </a:p>
-        </p:txBody>
-      </p:sp>
-      <p:pic>
-        <p:nvPicPr>
-          <p:cNvPr id="73" name="Picture 72" descr="excel.png"/>
-          <p:cNvPicPr>
-            <a:picLocks noChangeAspect="1"/>
-          </p:cNvPicPr>
-          <p:nvPr/>
-        </p:nvPicPr>
-        <p:blipFill>
-          <a:blip r:embed="rId5"/>
-          <a:stretch>
-            <a:fillRect/>
-          </a:stretch>
-        </p:blipFill>
-        <p:spPr>
-          <a:xfrm>
-            <a:off x="6217920" y="5937376"/>
-            <a:ext cx="347472" cy="323342"/>
-          </a:xfrm>
-          <a:prstGeom prst="rect">
-            <a:avLst/>
-          </a:prstGeom>
-        </p:spPr>
-      </p:pic>
-      <p:sp>
-        <p:nvSpPr>
-          <p:cNvPr id="74" name="TextBox 73"/>
-          <p:cNvSpPr txBox="1"/>
-          <p:nvPr/>
-        </p:nvSpPr>
-        <p:spPr>
-          <a:xfrm>
-            <a:off x="6647688" y="5879592"/>
-            <a:ext cx="1554480" cy="457200"/>
-          </a:xfrm>
-          <a:prstGeom prst="rect">
-            <a:avLst/>
-          </a:prstGeom>
-          <a:noFill/>
-        </p:spPr>
-        <p:txBody>
-          <a:bodyPr wrap="square" lIns="0" rIns="0" tIns="0" bIns="0" anchor="t">
-            <a:spAutoFit/>
-          </a:bodyPr>
-          <a:lstStyle/>
+              <a:t>Feed contract</a:t>
+            </a:r>
+          </a:p>
           <a:p>
             <a:pPr algn="l">
               <a:lnSpc>
-                <a:spcPct val="100000"/>
+                <a:spcPct val="105000"/>
               </a:lnSpc>
             </a:pPr>
             <a:r>
-              <a:rPr sz="950" b="1">
-                <a:solidFill>
-                  <a:srgbClr val="1C2127"/>
-                </a:solidFill>
-                <a:latin typeface="Calibri"/>
+              <a:rPr sz="819" b="0">
+                <a:solidFill>
+                  <a:srgbClr val="333F48"/>
+                </a:solidFill>
+                <a:latin typeface="Segoe UI"/>
               </a:rPr>
-              <a:t>STTM workbook</a:t>
-            </a:r>
-          </a:p>
-          <a:p>
-            <a:pPr algn="l">
-              <a:lnSpc>
-                <a:spcPct val="100000"/>
-              </a:lnSpc>
-            </a:pPr>
-            <a:r>
-              <a:rPr sz="950" b="0">
-                <a:solidFill>
-                  <a:srgbClr val="2F343C"/>
-                </a:solidFill>
-                <a:latin typeface="Calibri"/>
-              </a:rPr>
-              <a:t>.xlsx · client dialect</a:t>
-            </a:r>
-          </a:p>
-        </p:txBody>
-      </p:sp>
-      <p:pic>
-        <p:nvPicPr>
-          <p:cNvPr id="75" name="Picture 74" descr="json.png"/>
-          <p:cNvPicPr>
-            <a:picLocks noChangeAspect="1"/>
-          </p:cNvPicPr>
-          <p:nvPr/>
-        </p:nvPicPr>
-        <p:blipFill>
-          <a:blip r:embed="rId13"/>
-          <a:stretch>
-            <a:fillRect/>
-          </a:stretch>
-        </p:blipFill>
-        <p:spPr>
-          <a:xfrm>
-            <a:off x="8046720" y="5925312"/>
-            <a:ext cx="329184" cy="329184"/>
-          </a:xfrm>
-          <a:prstGeom prst="rect">
-            <a:avLst/>
-          </a:prstGeom>
-        </p:spPr>
-      </p:pic>
-      <p:sp>
-        <p:nvSpPr>
-          <p:cNvPr id="76" name="TextBox 75"/>
-          <p:cNvSpPr txBox="1"/>
-          <p:nvPr/>
-        </p:nvSpPr>
-        <p:spPr>
-          <a:xfrm>
-            <a:off x="8458200" y="5879592"/>
-            <a:ext cx="1600200" cy="457200"/>
-          </a:xfrm>
-          <a:prstGeom prst="rect">
-            <a:avLst/>
-          </a:prstGeom>
-          <a:noFill/>
-        </p:spPr>
-        <p:txBody>
-          <a:bodyPr wrap="square" lIns="0" rIns="0" tIns="0" bIns="0" anchor="t">
-            <a:spAutoFit/>
-          </a:bodyPr>
-          <a:lstStyle/>
-          <a:p>
-            <a:pPr algn="l">
-              <a:lnSpc>
-                <a:spcPct val="100000"/>
-              </a:lnSpc>
-            </a:pPr>
-            <a:r>
-              <a:rPr sz="950" b="1">
-                <a:solidFill>
-                  <a:srgbClr val="1C2127"/>
-                </a:solidFill>
-                <a:latin typeface="Calibri"/>
-              </a:rPr>
-              <a:t>Feed contract</a:t>
-            </a:r>
-          </a:p>
-          <a:p>
-            <a:pPr algn="l">
-              <a:lnSpc>
-                <a:spcPct val="100000"/>
-              </a:lnSpc>
-            </a:pPr>
-            <a:r>
-              <a:rPr sz="950" b="0">
-                <a:solidFill>
-                  <a:srgbClr val="2F343C"/>
-                </a:solidFill>
-                <a:latin typeface="Calibri"/>
-              </a:rPr>
-              <a:t>contract.json · machine-readable</a:t>
+              <a:t>contract.json</a:t>
             </a:r>
           </a:p>
         </p:txBody>
       </p:sp>
       <p:cxnSp>
         <p:nvCxnSpPr>
-          <p:cNvPr id="77" name="Connector 76"/>
+          <p:cNvPr id="102" name="Connector 101"/>
           <p:cNvCxnSpPr/>
           <p:nvPr/>
         </p:nvCxnSpPr>
         <p:spPr>
           <a:xfrm>
-            <a:off x="10058400" y="6089903"/>
-            <a:ext cx="228600" cy="0"/>
+            <a:off x="9674352" y="6336792"/>
+            <a:ext cx="237744" cy="0"/>
           </a:xfrm>
           <a:prstGeom prst="line">
             <a:avLst/>
           </a:prstGeom>
-          <a:ln w="15875">
+          <a:ln w="19050">
             <a:solidFill>
-              <a:srgbClr val="7961DB"/>
+              <a:srgbClr val="0A2458"/>
             </a:solidFill>
-            <a:tailEnd type="triangle" w="sm" len="sm"/>
+            <a:tailEnd type="triangle" w="med" len="med"/>
           </a:ln>
         </p:spPr>
         <p:style>
@@ -5930,14 +6901,14 @@
       </p:cxnSp>
       <p:sp>
         <p:nvSpPr>
-          <p:cNvPr id="78" name="TextBox 77"/>
+          <p:cNvPr id="103" name="TextBox 102"/>
           <p:cNvSpPr txBox="1"/>
           <p:nvPr/>
         </p:nvSpPr>
         <p:spPr>
           <a:xfrm>
-            <a:off x="10378440" y="5879592"/>
-            <a:ext cx="1173175" cy="502920"/>
+            <a:off x="10021824" y="6163055"/>
+            <a:ext cx="1383487" cy="365760"/>
           </a:xfrm>
           <a:prstGeom prst="rect">
             <a:avLst/>
@@ -5952,15 +6923,15 @@
           <a:p>
             <a:pPr algn="l">
               <a:lnSpc>
-                <a:spcPct val="100000"/>
+                <a:spcPct val="105000"/>
               </a:lnSpc>
             </a:pPr>
             <a:r>
-              <a:rPr sz="950" b="1">
-                <a:solidFill>
-                  <a:srgbClr val="5642A6"/>
-                </a:solidFill>
-                <a:latin typeface="Calibri"/>
+              <a:rPr sz="819" b="1">
+                <a:solidFill>
+                  <a:srgbClr val="003DA5"/>
+                </a:solidFill>
+                <a:latin typeface="Segoe UI"/>
               </a:rPr>
               <a:t>CodeGen agent</a:t>
             </a:r>
@@ -5968,176 +6939,73 @@
           <a:p>
             <a:pPr algn="l">
               <a:lnSpc>
-                <a:spcPct val="100000"/>
+                <a:spcPct val="105000"/>
               </a:lnSpc>
             </a:pPr>
             <a:r>
-              <a:rPr sz="950" b="1">
-                <a:solidFill>
-                  <a:srgbClr val="5642A6"/>
-                </a:solidFill>
-                <a:latin typeface="Calibri"/>
+              <a:rPr sz="819" b="1">
+                <a:solidFill>
+                  <a:srgbClr val="003DA5"/>
+                </a:solidFill>
+                <a:latin typeface="Segoe UI"/>
               </a:rPr>
               <a:t>Code Review agent</a:t>
             </a:r>
           </a:p>
         </p:txBody>
       </p:sp>
-      <p:cxnSp>
-        <p:nvCxnSpPr>
-          <p:cNvPr id="79" name="Connector 78"/>
-          <p:cNvCxnSpPr/>
-          <p:nvPr/>
-        </p:nvCxnSpPr>
-        <p:spPr>
-          <a:xfrm flipV="1">
-            <a:off x="1371600" y="5376672"/>
-            <a:ext cx="0" cy="164592"/>
-          </a:xfrm>
-          <a:prstGeom prst="line">
-            <a:avLst/>
-          </a:prstGeom>
-          <a:ln w="15875">
-            <a:solidFill>
-              <a:srgbClr val="D1980B"/>
-            </a:solidFill>
-            <a:prstDash val="dash"/>
+      <p:sp>
+        <p:nvSpPr>
+          <p:cNvPr id="104" name="Rectangle 103"/>
+          <p:cNvSpPr/>
+          <p:nvPr/>
+        </p:nvSpPr>
+        <p:spPr>
+          <a:xfrm>
+            <a:off x="0" y="6620256"/>
+            <a:ext cx="12191695" cy="237744"/>
+          </a:xfrm>
+          <a:prstGeom prst="rect">
+            <a:avLst/>
+          </a:prstGeom>
+          <a:solidFill>
+            <a:srgbClr val="0A2458"/>
+          </a:solidFill>
+          <a:ln>
+            <a:noFill/>
           </a:ln>
+          <a:effectLst/>
         </p:spPr>
         <p:style>
-          <a:lnRef idx="2">
+          <a:lnRef idx="1">
             <a:schemeClr val="accent1"/>
           </a:lnRef>
-          <a:fillRef idx="0">
+          <a:fillRef idx="3">
             <a:schemeClr val="accent1"/>
           </a:fillRef>
-          <a:effectRef idx="1">
+          <a:effectRef idx="2">
             <a:schemeClr val="accent1"/>
           </a:effectRef>
           <a:fontRef idx="minor">
-            <a:schemeClr val="tx1"/>
+            <a:schemeClr val="lt1"/>
           </a:fontRef>
         </p:style>
-      </p:cxnSp>
-      <p:cxnSp>
-        <p:nvCxnSpPr>
-          <p:cNvPr id="80" name="Connector 79"/>
-          <p:cNvCxnSpPr/>
-          <p:nvPr/>
-        </p:nvCxnSpPr>
-        <p:spPr>
-          <a:xfrm flipH="1">
-            <a:off x="347472" y="5376672"/>
-            <a:ext cx="1024128" cy="0"/>
-          </a:xfrm>
-          <a:prstGeom prst="line">
-            <a:avLst/>
-          </a:prstGeom>
-          <a:ln w="15875">
-            <a:solidFill>
-              <a:srgbClr val="D1980B"/>
-            </a:solidFill>
-            <a:prstDash val="dash"/>
-          </a:ln>
-        </p:spPr>
-        <p:style>
-          <a:lnRef idx="2">
-            <a:schemeClr val="accent1"/>
-          </a:lnRef>
-          <a:fillRef idx="0">
-            <a:schemeClr val="accent1"/>
-          </a:fillRef>
-          <a:effectRef idx="1">
-            <a:schemeClr val="accent1"/>
-          </a:effectRef>
-          <a:fontRef idx="minor">
-            <a:schemeClr val="tx1"/>
-          </a:fontRef>
-        </p:style>
-      </p:cxnSp>
-      <p:cxnSp>
-        <p:nvCxnSpPr>
-          <p:cNvPr id="81" name="Connector 80"/>
-          <p:cNvCxnSpPr/>
-          <p:nvPr/>
-        </p:nvCxnSpPr>
-        <p:spPr>
-          <a:xfrm flipV="1">
-            <a:off x="347472" y="1883664"/>
-            <a:ext cx="0" cy="3493008"/>
-          </a:xfrm>
-          <a:prstGeom prst="line">
-            <a:avLst/>
-          </a:prstGeom>
-          <a:ln w="15875">
-            <a:solidFill>
-              <a:srgbClr val="D1980B"/>
-            </a:solidFill>
-            <a:prstDash val="dash"/>
-          </a:ln>
-        </p:spPr>
-        <p:style>
-          <a:lnRef idx="2">
-            <a:schemeClr val="accent1"/>
-          </a:lnRef>
-          <a:fillRef idx="0">
-            <a:schemeClr val="accent1"/>
-          </a:fillRef>
-          <a:effectRef idx="1">
-            <a:schemeClr val="accent1"/>
-          </a:effectRef>
-          <a:fontRef idx="minor">
-            <a:schemeClr val="tx1"/>
-          </a:fontRef>
-        </p:style>
-      </p:cxnSp>
-      <p:cxnSp>
-        <p:nvCxnSpPr>
-          <p:cNvPr id="82" name="Connector 81"/>
-          <p:cNvCxnSpPr/>
-          <p:nvPr/>
-        </p:nvCxnSpPr>
-        <p:spPr>
-          <a:xfrm>
-            <a:off x="347472" y="1883664"/>
-            <a:ext cx="182880" cy="0"/>
-          </a:xfrm>
-          <a:prstGeom prst="line">
-            <a:avLst/>
-          </a:prstGeom>
-          <a:ln w="15875">
-            <a:solidFill>
-              <a:srgbClr val="D1980B"/>
-            </a:solidFill>
-            <a:prstDash val="dash"/>
-            <a:tailEnd type="triangle" w="sm" len="sm"/>
-          </a:ln>
-        </p:spPr>
-        <p:style>
-          <a:lnRef idx="2">
-            <a:schemeClr val="accent1"/>
-          </a:lnRef>
-          <a:fillRef idx="0">
-            <a:schemeClr val="accent1"/>
-          </a:fillRef>
-          <a:effectRef idx="1">
-            <a:schemeClr val="accent1"/>
-          </a:effectRef>
-          <a:fontRef idx="minor">
-            <a:schemeClr val="tx1"/>
-          </a:fontRef>
-        </p:style>
-      </p:cxnSp>
-      <p:sp>
-        <p:nvSpPr>
-          <p:cNvPr id="83" name="TextBox 82"/>
+        <p:txBody>
+          <a:bodyPr rtlCol="0" anchor="ctr"/>
+          <a:lstStyle/>
+          <a:p/>
+        </p:txBody>
+      </p:sp>
+      <p:sp>
+        <p:nvSpPr>
+          <p:cNvPr id="105" name="TextBox 104"/>
           <p:cNvSpPr txBox="1"/>
           <p:nvPr/>
         </p:nvSpPr>
         <p:spPr>
-          <a:xfrm rot="16200000">
-            <a:off x="-877824" y="3602735"/>
-            <a:ext cx="2103120" cy="219456"/>
+          <a:xfrm>
+            <a:off x="658368" y="6675120"/>
+            <a:ext cx="10874959" cy="182880"/>
           </a:xfrm>
           <a:prstGeom prst="rect">
             <a:avLst/>
@@ -6150,86 +7018,51 @@
           </a:bodyPr>
           <a:lstStyle/>
           <a:p>
-            <a:pPr algn="ctr"/>
-            <a:r>
-              <a:rPr sz="850" b="1">
-                <a:solidFill>
-                  <a:srgbClr val="866103"/>
-                </a:solidFill>
-                <a:latin typeface="Calibri"/>
+            <a:pPr algn="l"/>
+            <a:r>
+              <a:rPr sz="780" b="1" spc="100">
+                <a:solidFill>
+                  <a:srgbClr val="FFD9DC"/>
+                </a:solidFill>
+                <a:latin typeface="Segoe UI"/>
               </a:rPr>
-              <a:t>approved STTM goes back</a:t>
-            </a:r>
-          </a:p>
-        </p:txBody>
-      </p:sp>
-      <p:sp>
-        <p:nvSpPr>
-          <p:cNvPr id="84" name="TextBox 83"/>
-          <p:cNvSpPr txBox="1"/>
-          <p:nvPr/>
-        </p:nvSpPr>
-        <p:spPr>
-          <a:xfrm>
-            <a:off x="548640" y="6510528"/>
-            <a:ext cx="7772400" cy="274320"/>
-          </a:xfrm>
-          <a:prstGeom prst="rect">
-            <a:avLst/>
-          </a:prstGeom>
-          <a:noFill/>
-        </p:spPr>
-        <p:txBody>
-          <a:bodyPr wrap="square" lIns="0" rIns="0" tIns="0" bIns="0" anchor="t">
-            <a:spAutoFit/>
-          </a:bodyPr>
-          <a:lstStyle/>
-          <a:p>
-            <a:pPr algn="l"/>
-            <a:r>
-              <a:rPr sz="1100" b="1">
-                <a:solidFill>
-                  <a:srgbClr val="A04D2C"/>
-                </a:solidFill>
-                <a:latin typeface="Calibri"/>
-              </a:rPr>
-              <a:t>the model proposes</a:t>
-            </a:r>
-            <a:r>
-              <a:rPr sz="1100" b="0">
-                <a:solidFill>
-                  <a:srgbClr val="C5CBD3"/>
-                </a:solidFill>
-                <a:latin typeface="Calibri"/>
+              <a:t>ONE ANTHROPIC CALL PER DOCUMENT</a:t>
+            </a:r>
+            <a:r>
+              <a:rPr sz="780" b="0" spc="100">
+                <a:solidFill>
+                  <a:srgbClr val="6B7FA8"/>
+                </a:solidFill>
+                <a:latin typeface="Segoe UI"/>
               </a:rPr>
               <a:t>     ·     </a:t>
             </a:r>
             <a:r>
-              <a:rPr sz="1100" b="1">
-                <a:solidFill>
-                  <a:srgbClr val="007067"/>
-                </a:solidFill>
-                <a:latin typeface="Calibri"/>
+              <a:rPr sz="780" b="1" spc="100">
+                <a:solidFill>
+                  <a:srgbClr val="FFFFFF"/>
+                </a:solidFill>
+                <a:latin typeface="Segoe UI"/>
               </a:rPr>
-              <a:t>deterministic code audits and decides</a:t>
-            </a:r>
-            <a:r>
-              <a:rPr sz="1100" b="0">
-                <a:solidFill>
-                  <a:srgbClr val="C5CBD3"/>
-                </a:solidFill>
-                <a:latin typeface="Calibri"/>
+              <a:t>EVERYTHING ELSE IS DETERMINISTIC CODE</a:t>
+            </a:r>
+            <a:r>
+              <a:rPr sz="780" b="0" spc="100">
+                <a:solidFill>
+                  <a:srgbClr val="6B7FA8"/>
+                </a:solidFill>
+                <a:latin typeface="Segoe UI"/>
               </a:rPr>
               <a:t>     ·     </a:t>
             </a:r>
             <a:r>
-              <a:rPr sz="1100" b="1">
-                <a:solidFill>
-                  <a:srgbClr val="866103"/>
-                </a:solidFill>
-                <a:latin typeface="Calibri"/>
+              <a:rPr sz="780" b="1" spc="100">
+                <a:solidFill>
+                  <a:srgbClr val="FFFFFF"/>
+                </a:solidFill>
+                <a:latin typeface="Segoe UI"/>
               </a:rPr>
-              <a:t>a person resolves</a:t>
+              <a:t>A PERSON APPROVES</a:t>
             </a:r>
           </a:p>
         </p:txBody>

--- a/context/FRD-to-STTM-Agent-Solution-Architecture.pptx
+++ b/context/FRD-to-STTM-Agent-Solution-Architecture.pptx
@@ -4116,7 +4116,7 @@
                 </a:solidFill>
                 <a:latin typeface="Consolas"/>
               </a:rPr>
-              <a:t>DICT_&lt;feed&gt;.xlsx</a:t>
+              <a:t>VDD_&lt;feed&gt;.xlsx</a:t>
             </a:r>
           </a:p>
         </p:txBody>
@@ -5012,7 +5012,7 @@
                 </a:solidFill>
                 <a:latin typeface="Consolas"/>
               </a:rPr>
-              <a:t>frd_raw · sttm_reference · sttm_out_app · sttm_audit</a:t>
+              <a:t>frd_raw · vdd_raw · sttm_reference · sttm_out_app · sttm_audit</a:t>
             </a:r>
           </a:p>
         </p:txBody>
@@ -5141,7 +5141,7 @@
         <p:spPr>
           <a:xfrm>
             <a:off x="658368" y="4315968"/>
-            <a:ext cx="10874959" cy="1609344"/>
+            <a:ext cx="10874959" cy="1682496"/>
           </a:xfrm>
           <a:prstGeom prst="rect">
             <a:avLst/>
@@ -5183,7 +5183,7 @@
         <p:spPr>
           <a:xfrm>
             <a:off x="658368" y="4315968"/>
-            <a:ext cx="45720" cy="1609344"/>
+            <a:ext cx="45720" cy="1682496"/>
           </a:xfrm>
           <a:prstGeom prst="rect">
             <a:avLst/>
@@ -6274,8 +6274,8 @@
         </p:nvSpPr>
         <p:spPr>
           <a:xfrm>
-            <a:off x="859536" y="5522976"/>
-            <a:ext cx="10454335" cy="365760"/>
+            <a:off x="859536" y="5504688"/>
+            <a:ext cx="10454335" cy="457200"/>
           </a:xfrm>
           <a:prstGeom prst="rect">
             <a:avLst/>
@@ -6318,8 +6318,8 @@
         </p:nvSpPr>
         <p:spPr>
           <a:xfrm>
-            <a:off x="859536" y="5522976"/>
-            <a:ext cx="45720" cy="365760"/>
+            <a:off x="859536" y="5504688"/>
+            <a:ext cx="45720" cy="457200"/>
           </a:xfrm>
           <a:prstGeom prst="rect">
             <a:avLst/>
@@ -6360,8 +6360,8 @@
         </p:nvSpPr>
         <p:spPr>
           <a:xfrm>
-            <a:off x="1060704" y="5623560"/>
-            <a:ext cx="2286000" cy="201168"/>
+            <a:off x="1060704" y="5559551"/>
+            <a:ext cx="2194560" cy="201168"/>
           </a:xfrm>
           <a:prstGeom prst="rect">
             <a:avLst/>
@@ -6395,8 +6395,8 @@
         </p:nvSpPr>
         <p:spPr>
           <a:xfrm>
-            <a:off x="2871215" y="5614416"/>
-            <a:ext cx="8387791" cy="219456"/>
+            <a:off x="1060704" y="5742431"/>
+            <a:ext cx="2194560" cy="201168"/>
           </a:xfrm>
           <a:prstGeom prst="rect">
             <a:avLst/>
@@ -6411,34 +6411,60 @@
           <a:p>
             <a:pPr algn="l"/>
             <a:r>
-              <a:rPr sz="819" b="1">
-                <a:solidFill>
-                  <a:srgbClr val="0A2458"/>
+              <a:rPr sz="740" b="0">
+                <a:solidFill>
+                  <a:srgbClr val="455560"/>
                 </a:solidFill>
                 <a:latin typeface="Segoe UI"/>
               </a:rPr>
-              <a:t>Naming + engineering standards</a:t>
-            </a:r>
-            <a:r>
-              <a:rPr sz="819" b="0">
-                <a:solidFill>
-                  <a:srgbClr val="333F48"/>
+              <a:t>not handed over per run</a:t>
+            </a:r>
+          </a:p>
+        </p:txBody>
+      </p:sp>
+      <p:sp>
+        <p:nvSpPr>
+          <p:cNvPr id="92" name="TextBox 91"/>
+          <p:cNvSpPr txBox="1"/>
+          <p:nvPr/>
+        </p:nvSpPr>
+        <p:spPr>
+          <a:xfrm>
+            <a:off x="3310128" y="5559551"/>
+            <a:ext cx="7948879" cy="201168"/>
+          </a:xfrm>
+          <a:prstGeom prst="rect">
+            <a:avLst/>
+          </a:prstGeom>
+          <a:noFill/>
+        </p:spPr>
+        <p:txBody>
+          <a:bodyPr wrap="square" lIns="0" rIns="0" tIns="0" bIns="0" anchor="t">
+            <a:spAutoFit/>
+          </a:bodyPr>
+          <a:lstStyle/>
+          <a:p>
+            <a:pPr algn="l"/>
+            <a:r>
+              <a:rPr sz="800" b="1">
+                <a:solidFill>
+                  <a:srgbClr val="0A2458"/>
                 </a:solidFill>
                 <a:latin typeface="Segoe UI"/>
               </a:rPr>
-              <a:t> — versioned contracts, hashed into every run as </a:t>
-            </a:r>
-            <a:r>
-              <a:rPr sz="819" b="0">
-                <a:solidFill>
-                  <a:srgbClr val="003DA5"/>
-                </a:solidFill>
-                <a:latin typeface="Consolas"/>
+              <a:t>Standards contracts</a:t>
+            </a:r>
+            <a:r>
+              <a:rPr sz="800" b="0">
+                <a:solidFill>
+                  <a:srgbClr val="333F48"/>
+                </a:solidFill>
+                <a:latin typeface="Segoe UI"/>
               </a:rPr>
-              <a:t>standards_sha256</a:t>
-            </a:r>
-            <a:r>
-              <a:rPr sz="819" b="0">
+              <a:t>  naming + engineering, hashed into every run</a:t>
+            </a:r>
+            <a:r>
+              <a:rPr sz="800" b="0">
                 <a:solidFill>
                   <a:srgbClr val="CDD2D8"/>
                 </a:solidFill>
@@ -6447,7 +6473,51 @@
               <a:t>      ·      </a:t>
             </a:r>
             <a:r>
-              <a:rPr sz="819" b="1">
+              <a:rPr sz="800" b="1">
+                <a:solidFill>
+                  <a:srgbClr val="0A2458"/>
+                </a:solidFill>
+                <a:latin typeface="Segoe UI"/>
+              </a:rPr>
+              <a:t>Term catalog</a:t>
+            </a:r>
+            <a:r>
+              <a:rPr sz="800" b="0">
+                <a:solidFill>
+                  <a:srgbClr val="333F48"/>
+                </a:solidFill>
+                <a:latin typeface="Segoe UI"/>
+              </a:rPr>
+              <a:t>  the column vocabulary, harvested at sync</a:t>
+            </a:r>
+          </a:p>
+        </p:txBody>
+      </p:sp>
+      <p:sp>
+        <p:nvSpPr>
+          <p:cNvPr id="93" name="TextBox 92"/>
+          <p:cNvSpPr txBox="1"/>
+          <p:nvPr/>
+        </p:nvSpPr>
+        <p:spPr>
+          <a:xfrm>
+            <a:off x="3310128" y="5751575"/>
+            <a:ext cx="7948879" cy="201168"/>
+          </a:xfrm>
+          <a:prstGeom prst="rect">
+            <a:avLst/>
+          </a:prstGeom>
+          <a:noFill/>
+        </p:spPr>
+        <p:txBody>
+          <a:bodyPr wrap="square" lIns="0" rIns="0" tIns="0" bIns="0" anchor="t">
+            <a:spAutoFit/>
+          </a:bodyPr>
+          <a:lstStyle/>
+          <a:p>
+            <a:pPr algn="l"/>
+            <a:r>
+              <a:rPr sz="800" b="1">
                 <a:solidFill>
                   <a:srgbClr val="0A2458"/>
                 </a:solidFill>
@@ -6456,27 +6526,36 @@
               <a:t>Approved-STTM corpus</a:t>
             </a:r>
             <a:r>
-              <a:rPr sz="819" b="0">
+              <a:rPr sz="800" b="0">
                 <a:solidFill>
                   <a:srgbClr val="333F48"/>
                 </a:solidFill>
                 <a:latin typeface="Segoe UI"/>
               </a:rPr>
-              <a:t> — layout template + golden eval</a:t>
+              <a:t>  layout only, plus the after-the-fact eval.  </a:t>
+            </a:r>
+            <a:r>
+              <a:rPr sz="800" b="1">
+                <a:solidFill>
+                  <a:srgbClr val="D2202F"/>
+                </a:solidFill>
+                <a:latin typeface="Segoe UI"/>
+              </a:rPr>
+              <a:t>A RUN NEVER OPENS AN STTM.</a:t>
             </a:r>
           </a:p>
         </p:txBody>
       </p:sp>
       <p:cxnSp>
         <p:nvCxnSpPr>
-          <p:cNvPr id="92" name="Connector 91"/>
+          <p:cNvPr id="94" name="Connector 93"/>
           <p:cNvCxnSpPr/>
           <p:nvPr/>
         </p:nvCxnSpPr>
         <p:spPr>
           <a:xfrm>
-            <a:off x="1938528" y="5925312"/>
-            <a:ext cx="0" cy="146304"/>
+            <a:off x="1938528" y="5998464"/>
+            <a:ext cx="0" cy="109728"/>
           </a:xfrm>
           <a:prstGeom prst="line">
             <a:avLst/>
@@ -6505,13 +6584,13 @@
       </p:cxnSp>
       <p:sp>
         <p:nvSpPr>
-          <p:cNvPr id="93" name="TextBox 92"/>
+          <p:cNvPr id="95" name="TextBox 94"/>
           <p:cNvSpPr txBox="1"/>
           <p:nvPr/>
         </p:nvSpPr>
         <p:spPr>
           <a:xfrm>
-            <a:off x="2121408" y="5897879"/>
+            <a:off x="2121408" y="5952743"/>
             <a:ext cx="9046159" cy="219456"/>
           </a:xfrm>
           <a:prstGeom prst="rect">
@@ -6540,13 +6619,13 @@
       </p:sp>
       <p:sp>
         <p:nvSpPr>
-          <p:cNvPr id="94" name="Rectangle 93"/>
+          <p:cNvPr id="96" name="Rectangle 95"/>
           <p:cNvSpPr/>
           <p:nvPr/>
         </p:nvSpPr>
         <p:spPr>
           <a:xfrm>
-            <a:off x="658368" y="6071616"/>
+            <a:off x="658368" y="6108192"/>
             <a:ext cx="5394960" cy="493776"/>
           </a:xfrm>
           <a:prstGeom prst="rect">
@@ -6584,7 +6663,7 @@
       </p:sp>
       <p:pic>
         <p:nvPicPr>
-          <p:cNvPr id="95" name="Picture 94" descr="user.png"/>
+          <p:cNvPr id="97" name="Picture 96" descr="user.png"/>
           <p:cNvPicPr>
             <a:picLocks noChangeAspect="1"/>
           </p:cNvPicPr>
@@ -6598,7 +6677,7 @@
         </p:blipFill>
         <p:spPr>
           <a:xfrm>
-            <a:off x="804672" y="6199631"/>
+            <a:off x="804672" y="6236207"/>
             <a:ext cx="256032" cy="256032"/>
           </a:xfrm>
           <a:prstGeom prst="rect">
@@ -6608,13 +6687,13 @@
       </p:pic>
       <p:sp>
         <p:nvSpPr>
-          <p:cNvPr id="96" name="TextBox 95"/>
+          <p:cNvPr id="98" name="TextBox 97"/>
           <p:cNvSpPr txBox="1"/>
           <p:nvPr/>
         </p:nvSpPr>
         <p:spPr>
           <a:xfrm>
-            <a:off x="1152144" y="6144768"/>
+            <a:off x="1152144" y="6181344"/>
             <a:ext cx="4754880" cy="402336"/>
           </a:xfrm>
           <a:prstGeom prst="rect">
@@ -6663,13 +6742,13 @@
       </p:sp>
       <p:sp>
         <p:nvSpPr>
-          <p:cNvPr id="97" name="Rectangle 96"/>
+          <p:cNvPr id="99" name="Rectangle 98"/>
           <p:cNvSpPr/>
           <p:nvPr/>
         </p:nvSpPr>
         <p:spPr>
           <a:xfrm>
-            <a:off x="6254496" y="6071616"/>
+            <a:off x="6254496" y="6108192"/>
             <a:ext cx="5278831" cy="493776"/>
           </a:xfrm>
           <a:prstGeom prst="rect">
@@ -6707,7 +6786,7 @@
       </p:sp>
       <p:pic>
         <p:nvPicPr>
-          <p:cNvPr id="98" name="Picture 97" descr="excel.png"/>
+          <p:cNvPr id="100" name="Picture 99" descr="excel.png"/>
           <p:cNvPicPr>
             <a:picLocks noChangeAspect="1"/>
           </p:cNvPicPr>
@@ -6721,7 +6800,7 @@
         </p:blipFill>
         <p:spPr>
           <a:xfrm>
-            <a:off x="6373368" y="6217031"/>
+            <a:off x="6373368" y="6253607"/>
             <a:ext cx="237744" cy="221234"/>
           </a:xfrm>
           <a:prstGeom prst="rect">
@@ -6731,13 +6810,13 @@
       </p:pic>
       <p:sp>
         <p:nvSpPr>
-          <p:cNvPr id="99" name="TextBox 98"/>
+          <p:cNvPr id="101" name="TextBox 100"/>
           <p:cNvSpPr txBox="1"/>
           <p:nvPr/>
         </p:nvSpPr>
         <p:spPr>
           <a:xfrm>
-            <a:off x="6675120" y="6163055"/>
+            <a:off x="6675120" y="6199631"/>
             <a:ext cx="1353312" cy="365760"/>
           </a:xfrm>
           <a:prstGeom prst="rect">
@@ -6786,7 +6865,7 @@
       </p:sp>
       <p:pic>
         <p:nvPicPr>
-          <p:cNvPr id="100" name="Picture 99" descr="json.png"/>
+          <p:cNvPr id="102" name="Picture 101" descr="json.png"/>
           <p:cNvPicPr>
             <a:picLocks noChangeAspect="1"/>
           </p:cNvPicPr>
@@ -6800,7 +6879,7 @@
         </p:blipFill>
         <p:spPr>
           <a:xfrm>
-            <a:off x="8065008" y="6208776"/>
+            <a:off x="8065008" y="6245352"/>
             <a:ext cx="219456" cy="219456"/>
           </a:xfrm>
           <a:prstGeom prst="rect">
@@ -6810,13 +6889,13 @@
       </p:pic>
       <p:sp>
         <p:nvSpPr>
-          <p:cNvPr id="101" name="TextBox 100"/>
+          <p:cNvPr id="103" name="TextBox 102"/>
           <p:cNvSpPr txBox="1"/>
           <p:nvPr/>
         </p:nvSpPr>
         <p:spPr>
           <a:xfrm>
-            <a:off x="8357616" y="6163055"/>
+            <a:off x="8357616" y="6199631"/>
             <a:ext cx="1280160" cy="365760"/>
           </a:xfrm>
           <a:prstGeom prst="rect">
@@ -6865,13 +6944,13 @@
       </p:sp>
       <p:cxnSp>
         <p:nvCxnSpPr>
-          <p:cNvPr id="102" name="Connector 101"/>
+          <p:cNvPr id="104" name="Connector 103"/>
           <p:cNvCxnSpPr/>
           <p:nvPr/>
         </p:nvCxnSpPr>
         <p:spPr>
           <a:xfrm>
-            <a:off x="9674352" y="6336792"/>
+            <a:off x="9674352" y="6373368"/>
             <a:ext cx="237744" cy="0"/>
           </a:xfrm>
           <a:prstGeom prst="line">
@@ -6901,13 +6980,13 @@
       </p:cxnSp>
       <p:sp>
         <p:nvSpPr>
-          <p:cNvPr id="103" name="TextBox 102"/>
+          <p:cNvPr id="105" name="TextBox 104"/>
           <p:cNvSpPr txBox="1"/>
           <p:nvPr/>
         </p:nvSpPr>
         <p:spPr>
           <a:xfrm>
-            <a:off x="10021824" y="6163055"/>
+            <a:off x="10021824" y="6199631"/>
             <a:ext cx="1383487" cy="365760"/>
           </a:xfrm>
           <a:prstGeom prst="rect">
@@ -6956,7 +7035,7 @@
       </p:sp>
       <p:sp>
         <p:nvSpPr>
-          <p:cNvPr id="104" name="Rectangle 103"/>
+          <p:cNvPr id="106" name="Rectangle 105"/>
           <p:cNvSpPr/>
           <p:nvPr/>
         </p:nvSpPr>
@@ -6998,7 +7077,7 @@
       </p:sp>
       <p:sp>
         <p:nvSpPr>
-          <p:cNvPr id="105" name="TextBox 104"/>
+          <p:cNvPr id="107" name="TextBox 106"/>
           <p:cNvSpPr txBox="1"/>
           <p:nvPr/>
         </p:nvSpPr>

--- a/context/FRD-to-STTM-Agent-Solution-Architecture.pptx
+++ b/context/FRD-to-STTM-Agent-Solution-Architecture.pptx
@@ -3897,7 +3897,7 @@
                 </a:solidFill>
                 <a:latin typeface="Consolas"/>
               </a:rPr>
-              <a:t>FRD_&lt;feed&gt;.docx</a:t>
+              <a:t>FRD_&lt;source&gt;.docx</a:t>
             </a:r>
           </a:p>
         </p:txBody>
@@ -3971,7 +3971,7 @@
                 </a:solidFill>
                 <a:latin typeface="Segoe UI"/>
               </a:rPr>
-              <a:t>The feed-level frame — file pattern and format, target schema and table per layer, load strategy, landing folder, DQ and recycle rules. Authored and approved by ACFC's BSAs.</a:t>
+              <a:t>The source-level frame — file pattern and format, target schema and table per layer, load strategy, landing folder, DQ and recycle rules. Authored and approved by ACFC's BSAs.</a:t>
             </a:r>
           </a:p>
         </p:txBody>
@@ -4116,7 +4116,7 @@
                 </a:solidFill>
                 <a:latin typeface="Consolas"/>
               </a:rPr>
-              <a:t>VDD_&lt;feed&gt;.xlsx</a:t>
+              <a:t>VDD_&lt;source&gt;.xlsx</a:t>
             </a:r>
           </a:p>
         </p:txBody>
@@ -6612,7 +6612,7 @@
                 </a:solidFill>
                 <a:latin typeface="Segoe UI"/>
               </a:rPr>
-              <a:t>draft STTM .xlsx  +  feed contract .json   →   to a named person</a:t>
+              <a:t>draft STTM .xlsx  +  source contract .json   →   to a named person</a:t>
             </a:r>
           </a:p>
         </p:txBody>
@@ -6921,7 +6921,7 @@
                 </a:solidFill>
                 <a:latin typeface="Segoe UI"/>
               </a:rPr>
-              <a:t>Feed contract</a:t>
+              <a:t>Source contract</a:t>
             </a:r>
           </a:p>
           <a:p>
